--- a/slides/sesion-03.pptx
+++ b/slides/sesion-03.pptx
@@ -4186,7 +4186,7 @@
                 </a:solidFill>
                 <a:latin typeface="Calibri"/>
               </a:rPr>
-              <a:t>•  Examen Parcial (sesión 5): defensa del Proyecto 1</a:t>
+              <a:t>•  Examen Parcial (sesión 5): escrito en línea + entrega del Proyecto 1</a:t>
             </a:r>
           </a:p>
         </p:txBody>

--- a/slides/sesion-03.pptx
+++ b/slides/sesion-03.pptx
@@ -16,6 +16,8 @@
     <p:sldId id="264" r:id="rId15"/>
     <p:sldId id="265" r:id="rId16"/>
     <p:sldId id="266" r:id="rId17"/>
+    <p:sldId id="267" r:id="rId18"/>
+    <p:sldId id="268" r:id="rId19"/>
   </p:sldIdLst>
   <p:sldSz cx="12191695" cy="6858000" type="screen4x3"/>
   <p:notesSz cx="6858000" cy="9144000"/>
@@ -3385,7 +3387,7 @@
             <a:r>
               <a:rPr sz="1500" b="0">
                 <a:solidFill>
-                  <a:srgbClr val="8A7C70"/>
+                  <a:srgbClr val="6F645B"/>
                 </a:solidFill>
                 <a:latin typeface="Calibri"/>
               </a:rPr>
@@ -3422,25 +3424,23 @@
       <p:grpSpPr/>
       <p:sp>
         <p:nvSpPr>
-          <p:cNvPr id="2" name="Rounded Rectangle 1"/>
+          <p:cNvPr id="2" name="Rectangle 1"/>
           <p:cNvSpPr/>
           <p:nvPr/>
         </p:nvSpPr>
         <p:spPr>
           <a:xfrm>
-            <a:off x="640080" y="640080"/>
-            <a:ext cx="10908792" cy="5577840"/>
-          </a:xfrm>
-          <a:prstGeom prst="roundRect">
+            <a:off x="0" y="0"/>
+            <a:ext cx="12191695" cy="146304"/>
+          </a:xfrm>
+          <a:prstGeom prst="rect">
             <a:avLst/>
           </a:prstGeom>
           <a:solidFill>
-            <a:srgbClr val="FFFFFF"/>
+            <a:srgbClr val="C84B31"/>
           </a:solidFill>
-          <a:ln w="15240">
-            <a:solidFill>
-              <a:srgbClr val="EADDC8"/>
-            </a:solidFill>
+          <a:ln>
+            <a:noFill/>
           </a:ln>
           <a:effectLst/>
         </p:spPr>
@@ -3468,14 +3468,92 @@
       </p:sp>
       <p:sp>
         <p:nvSpPr>
-          <p:cNvPr id="3" name="Rectangle 2"/>
+          <p:cNvPr id="3" name="TextBox 2"/>
+          <p:cNvSpPr txBox="1"/>
+          <p:nvPr/>
+        </p:nvSpPr>
+        <p:spPr>
+          <a:xfrm>
+            <a:off x="822960" y="457200"/>
+            <a:ext cx="10515600" cy="457200"/>
+          </a:xfrm>
+          <a:prstGeom prst="rect">
+            <a:avLst/>
+          </a:prstGeom>
+          <a:noFill/>
+        </p:spPr>
+        <p:txBody>
+          <a:bodyPr wrap="square" anchor="t">
+            <a:spAutoFit/>
+          </a:bodyPr>
+          <a:lstStyle/>
+          <a:p>
+            <a:pPr algn="l">
+              <a:spcAft>
+                <a:spcPts val="600"/>
+              </a:spcAft>
+            </a:pPr>
+            <a:r>
+              <a:rPr sz="1800" b="1">
+                <a:solidFill>
+                  <a:srgbClr val="C84B31"/>
+                </a:solidFill>
+                <a:latin typeface="Calibri"/>
+              </a:rPr>
+              <a:t>A DÓNDE LLEGAMOS</a:t>
+            </a:r>
+          </a:p>
+        </p:txBody>
+      </p:sp>
+      <p:sp>
+        <p:nvSpPr>
+          <p:cNvPr id="4" name="TextBox 3"/>
+          <p:cNvSpPr txBox="1"/>
+          <p:nvPr/>
+        </p:nvSpPr>
+        <p:spPr>
+          <a:xfrm>
+            <a:off x="822960" y="914400"/>
+            <a:ext cx="10607040" cy="1005840"/>
+          </a:xfrm>
+          <a:prstGeom prst="rect">
+            <a:avLst/>
+          </a:prstGeom>
+          <a:noFill/>
+        </p:spPr>
+        <p:txBody>
+          <a:bodyPr wrap="square" anchor="t">
+            <a:spAutoFit/>
+          </a:bodyPr>
+          <a:lstStyle/>
+          <a:p>
+            <a:pPr algn="l">
+              <a:spcAft>
+                <a:spcPts val="600"/>
+              </a:spcAft>
+            </a:pPr>
+            <a:r>
+              <a:rPr sz="3800" b="1">
+                <a:solidFill>
+                  <a:srgbClr val="6D2E46"/>
+                </a:solidFill>
+                <a:latin typeface="Calibri"/>
+              </a:rPr>
+              <a:t>Ruta del Café: con datos y lista para instalar</a:t>
+            </a:r>
+          </a:p>
+        </p:txBody>
+      </p:sp>
+      <p:sp>
+        <p:nvSpPr>
+          <p:cNvPr id="5" name="Rectangle 4"/>
           <p:cNvSpPr/>
           <p:nvPr/>
         </p:nvSpPr>
         <p:spPr>
           <a:xfrm>
-            <a:off x="640080" y="640080"/>
-            <a:ext cx="201168" cy="5577840"/>
+            <a:off x="868680" y="1783080"/>
+            <a:ext cx="1554480" cy="64008"/>
           </a:xfrm>
           <a:prstGeom prst="rect">
             <a:avLst/>
@@ -3512,14 +3590,84 @@
       </p:sp>
       <p:sp>
         <p:nvSpPr>
-          <p:cNvPr id="4" name="TextBox 3"/>
+          <p:cNvPr id="6" name="Rounded Rectangle 5"/>
+          <p:cNvSpPr/>
+          <p:nvPr/>
+        </p:nvSpPr>
+        <p:spPr>
+          <a:xfrm>
+            <a:off x="9134856" y="1819655"/>
+            <a:ext cx="2053369" cy="4315968"/>
+          </a:xfrm>
+          <a:prstGeom prst="roundRect">
+            <a:avLst/>
+          </a:prstGeom>
+          <a:solidFill>
+            <a:srgbClr val="FFFFFF"/>
+          </a:solidFill>
+          <a:ln w="15240">
+            <a:solidFill>
+              <a:srgbClr val="6D2E46"/>
+            </a:solidFill>
+          </a:ln>
+          <a:effectLst/>
+        </p:spPr>
+        <p:style>
+          <a:lnRef idx="1">
+            <a:schemeClr val="accent1"/>
+          </a:lnRef>
+          <a:fillRef idx="3">
+            <a:schemeClr val="accent1"/>
+          </a:fillRef>
+          <a:effectRef idx="2">
+            <a:schemeClr val="accent1"/>
+          </a:effectRef>
+          <a:fontRef idx="minor">
+            <a:schemeClr val="lt1"/>
+          </a:fontRef>
+        </p:style>
+        <p:txBody>
+          <a:bodyPr rtlCol="0" anchor="ctr"/>
+          <a:lstStyle/>
+          <a:p>
+            <a:pPr algn="ctr"/>
+          </a:p>
+        </p:txBody>
+      </p:sp>
+      <p:pic>
+        <p:nvPicPr>
+          <p:cNvPr id="7" name="Picture 6" descr="ruta-home.png"/>
+          <p:cNvPicPr>
+            <a:picLocks noChangeAspect="1"/>
+          </p:cNvPicPr>
+          <p:nvPr/>
+        </p:nvPicPr>
+        <p:blipFill>
+          <a:blip r:embed="rId2"/>
+          <a:stretch>
+            <a:fillRect/>
+          </a:stretch>
+        </p:blipFill>
+        <p:spPr>
+          <a:xfrm>
+            <a:off x="9189720" y="1874519"/>
+            <a:ext cx="1943642" cy="4206240"/>
+          </a:xfrm>
+          <a:prstGeom prst="rect">
+            <a:avLst/>
+          </a:prstGeom>
+        </p:spPr>
+      </p:pic>
+      <p:sp>
+        <p:nvSpPr>
+          <p:cNvPr id="8" name="TextBox 7"/>
           <p:cNvSpPr txBox="1"/>
           <p:nvPr/>
         </p:nvSpPr>
         <p:spPr>
           <a:xfrm>
-            <a:off x="1051560" y="960120"/>
-            <a:ext cx="10058400" cy="457200"/>
+            <a:off x="8366760" y="6208775"/>
+            <a:ext cx="3589561" cy="457200"/>
           </a:xfrm>
           <a:prstGeom prst="rect">
             <a:avLst/>
@@ -3532,72 +3680,33 @@
           </a:bodyPr>
           <a:lstStyle/>
           <a:p>
-            <a:pPr algn="l">
+            <a:pPr algn="ctr">
               <a:spcAft>
                 <a:spcPts val="600"/>
               </a:spcAft>
             </a:pPr>
             <a:r>
-              <a:rPr sz="2000" b="1">
-                <a:solidFill>
-                  <a:srgbClr val="C84B31"/>
-                </a:solidFill>
-                <a:latin typeface="Calibri"/>
-              </a:rPr>
-              <a:t>LABORATORIO DE HOY</a:t>
-            </a:r>
-          </a:p>
-        </p:txBody>
-      </p:sp>
-      <p:sp>
-        <p:nvSpPr>
-          <p:cNvPr id="5" name="TextBox 4"/>
+              <a:rPr sz="1300" b="1">
+                <a:solidFill>
+                  <a:srgbClr val="6D2E46"/>
+                </a:solidFill>
+                <a:latin typeface="Calibri"/>
+              </a:rPr>
+              <a:t>Con datos y lista para instalar</a:t>
+            </a:r>
+          </a:p>
+        </p:txBody>
+      </p:sp>
+      <p:sp>
+        <p:nvSpPr>
+          <p:cNvPr id="9" name="TextBox 8"/>
           <p:cNvSpPr txBox="1"/>
           <p:nvPr/>
         </p:nvSpPr>
         <p:spPr>
           <a:xfrm>
-            <a:off x="1051560" y="1463040"/>
-            <a:ext cx="10058400" cy="914400"/>
-          </a:xfrm>
-          <a:prstGeom prst="rect">
-            <a:avLst/>
-          </a:prstGeom>
-          <a:noFill/>
-        </p:spPr>
-        <p:txBody>
-          <a:bodyPr wrap="square" anchor="t">
-            <a:spAutoFit/>
-          </a:bodyPr>
-          <a:lstStyle/>
-          <a:p>
-            <a:pPr algn="l">
-              <a:spcAft>
-                <a:spcPts val="600"/>
-              </a:spcAft>
-            </a:pPr>
-            <a:r>
-              <a:rPr sz="3400" b="1">
-                <a:solidFill>
-                  <a:srgbClr val="6D2E46"/>
-                </a:solidFill>
-                <a:latin typeface="Calibri"/>
-              </a:rPr>
-              <a:t>Laboratorio 3 — PWA con datos, instalable</a:t>
-            </a:r>
-          </a:p>
-        </p:txBody>
-      </p:sp>
-      <p:sp>
-        <p:nvSpPr>
-          <p:cNvPr id="6" name="TextBox 5"/>
-          <p:cNvSpPr txBox="1"/>
-          <p:nvPr/>
-        </p:nvSpPr>
-        <p:spPr>
-          <a:xfrm>
-            <a:off x="1097280" y="2606040"/>
-            <a:ext cx="9875520" cy="3383280"/>
+            <a:off x="896112" y="2286000"/>
+            <a:ext cx="7680960" cy="4023360"/>
           </a:xfrm>
           <a:prstGeom prst="rect">
             <a:avLst/>
@@ -3616,13 +3725,13 @@
               </a:spcAft>
             </a:pPr>
             <a:r>
-              <a:rPr sz="2300">
+              <a:rPr sz="2200">
                 <a:solidFill>
                   <a:srgbClr val="2B2B2B"/>
                 </a:solidFill>
                 <a:latin typeface="Calibri"/>
               </a:rPr>
-              <a:t>•  Guarda un checkpoint (cambio grande)</a:t>
+              <a:t>•  La lista sale de Firestore, no del código</a:t>
             </a:r>
           </a:p>
           <a:p>
@@ -3632,13 +3741,13 @@
               </a:spcAft>
             </a:pPr>
             <a:r>
-              <a:rPr sz="2300">
+              <a:rPr sz="2200">
                 <a:solidFill>
                   <a:srgbClr val="2B2B2B"/>
                 </a:solidFill>
                 <a:latin typeface="Calibri"/>
               </a:rPr>
-              <a:t>•  Conecta tu app a Firestore y aprueba "Enable Firebase"</a:t>
+              <a:t>•  El formulario (＋) crea registros nuevos</a:t>
             </a:r>
           </a:p>
           <a:p>
@@ -3648,13 +3757,13 @@
               </a:spcAft>
             </a:pPr>
             <a:r>
-              <a:rPr sz="2300">
+              <a:rPr sz="2200">
                 <a:solidFill>
                   <a:srgbClr val="2B2B2B"/>
                 </a:solidFill>
                 <a:latin typeface="Calibri"/>
               </a:rPr>
-              <a:t>•  Agrega el formulario para crear registros</a:t>
+              <a:t>•  Aparecen sin recargar, gracias a onSnapshot</a:t>
             </a:r>
           </a:p>
           <a:p>
@@ -3664,13 +3773,13 @@
               </a:spcAft>
             </a:pPr>
             <a:r>
-              <a:rPr sz="2300">
+              <a:rPr sz="2200">
                 <a:solidFill>
                   <a:srgbClr val="2B2B2B"/>
                 </a:solidFill>
                 <a:latin typeface="Calibri"/>
               </a:rPr>
-              <a:t>•  Verifica que aparece sin recargar (tiempo real)</a:t>
+              <a:t>•  Manifest + íconos + service worker → instalable</a:t>
             </a:r>
           </a:p>
           <a:p>
@@ -3680,13 +3789,13 @@
               </a:spcAft>
             </a:pPr>
             <a:r>
-              <a:rPr sz="2300">
+              <a:rPr sz="2200">
                 <a:solidFill>
                   <a:srgbClr val="2B2B2B"/>
                 </a:solidFill>
                 <a:latin typeface="Calibri"/>
               </a:rPr>
-              <a:t>•  Hazla instalable como PWA y publícala en Cloud Run</a:t>
+              <a:t>•  Publicada en Cloud Run con su propia URL</a:t>
             </a:r>
           </a:p>
         </p:txBody>
@@ -3732,6 +3841,911 @@
             <a:avLst/>
           </a:prstGeom>
           <a:solidFill>
+            <a:srgbClr val="E3B23C"/>
+          </a:solidFill>
+          <a:ln>
+            <a:noFill/>
+          </a:ln>
+          <a:effectLst/>
+        </p:spPr>
+        <p:style>
+          <a:lnRef idx="1">
+            <a:schemeClr val="accent1"/>
+          </a:lnRef>
+          <a:fillRef idx="3">
+            <a:schemeClr val="accent1"/>
+          </a:fillRef>
+          <a:effectRef idx="2">
+            <a:schemeClr val="accent1"/>
+          </a:effectRef>
+          <a:fontRef idx="minor">
+            <a:schemeClr val="lt1"/>
+          </a:fontRef>
+        </p:style>
+        <p:txBody>
+          <a:bodyPr rtlCol="0" anchor="ctr"/>
+          <a:lstStyle/>
+          <a:p>
+            <a:pPr algn="ctr"/>
+          </a:p>
+        </p:txBody>
+      </p:sp>
+      <p:sp>
+        <p:nvSpPr>
+          <p:cNvPr id="3" name="TextBox 2"/>
+          <p:cNvSpPr txBox="1"/>
+          <p:nvPr/>
+        </p:nvSpPr>
+        <p:spPr>
+          <a:xfrm>
+            <a:off x="822960" y="457200"/>
+            <a:ext cx="10515600" cy="457200"/>
+          </a:xfrm>
+          <a:prstGeom prst="rect">
+            <a:avLst/>
+          </a:prstGeom>
+          <a:noFill/>
+        </p:spPr>
+        <p:txBody>
+          <a:bodyPr wrap="square" anchor="t">
+            <a:spAutoFit/>
+          </a:bodyPr>
+          <a:lstStyle/>
+          <a:p>
+            <a:pPr algn="l">
+              <a:spcAft>
+                <a:spcPts val="600"/>
+              </a:spcAft>
+            </a:pPr>
+            <a:r>
+              <a:rPr sz="1800" b="1">
+                <a:solidFill>
+                  <a:srgbClr val="C84B31"/>
+                </a:solidFill>
+                <a:latin typeface="Calibri"/>
+              </a:rPr>
+              <a:t>META Y RESULTADO</a:t>
+            </a:r>
+          </a:p>
+        </p:txBody>
+      </p:sp>
+      <p:sp>
+        <p:nvSpPr>
+          <p:cNvPr id="4" name="TextBox 3"/>
+          <p:cNvSpPr txBox="1"/>
+          <p:nvPr/>
+        </p:nvSpPr>
+        <p:spPr>
+          <a:xfrm>
+            <a:off x="822960" y="914400"/>
+            <a:ext cx="10607040" cy="1005840"/>
+          </a:xfrm>
+          <a:prstGeom prst="rect">
+            <a:avLst/>
+          </a:prstGeom>
+          <a:noFill/>
+        </p:spPr>
+        <p:txBody>
+          <a:bodyPr wrap="square" anchor="t">
+            <a:spAutoFit/>
+          </a:bodyPr>
+          <a:lstStyle/>
+          <a:p>
+            <a:pPr algn="l">
+              <a:spcAft>
+                <a:spcPts val="600"/>
+              </a:spcAft>
+            </a:pPr>
+            <a:r>
+              <a:rPr sz="3800" b="1">
+                <a:solidFill>
+                  <a:srgbClr val="6D2E46"/>
+                </a:solidFill>
+                <a:latin typeface="Calibri"/>
+              </a:rPr>
+              <a:t>Ruta del Café terminada: mock-up y app real</a:t>
+            </a:r>
+          </a:p>
+        </p:txBody>
+      </p:sp>
+      <p:sp>
+        <p:nvSpPr>
+          <p:cNvPr id="5" name="Rectangle 4"/>
+          <p:cNvSpPr/>
+          <p:nvPr/>
+        </p:nvSpPr>
+        <p:spPr>
+          <a:xfrm>
+            <a:off x="868680" y="1783080"/>
+            <a:ext cx="1554480" cy="64008"/>
+          </a:xfrm>
+          <a:prstGeom prst="rect">
+            <a:avLst/>
+          </a:prstGeom>
+          <a:solidFill>
+            <a:srgbClr val="E3B23C"/>
+          </a:solidFill>
+          <a:ln>
+            <a:noFill/>
+          </a:ln>
+          <a:effectLst/>
+        </p:spPr>
+        <p:style>
+          <a:lnRef idx="1">
+            <a:schemeClr val="accent1"/>
+          </a:lnRef>
+          <a:fillRef idx="3">
+            <a:schemeClr val="accent1"/>
+          </a:fillRef>
+          <a:effectRef idx="2">
+            <a:schemeClr val="accent1"/>
+          </a:effectRef>
+          <a:fontRef idx="minor">
+            <a:schemeClr val="lt1"/>
+          </a:fontRef>
+        </p:style>
+        <p:txBody>
+          <a:bodyPr rtlCol="0" anchor="ctr"/>
+          <a:lstStyle/>
+          <a:p>
+            <a:pPr algn="ctr"/>
+          </a:p>
+        </p:txBody>
+      </p:sp>
+      <p:sp>
+        <p:nvSpPr>
+          <p:cNvPr id="6" name="Rounded Rectangle 5"/>
+          <p:cNvSpPr/>
+          <p:nvPr/>
+        </p:nvSpPr>
+        <p:spPr>
+          <a:xfrm>
+            <a:off x="658368" y="2011680"/>
+            <a:ext cx="5349240" cy="658368"/>
+          </a:xfrm>
+          <a:prstGeom prst="roundRect">
+            <a:avLst/>
+          </a:prstGeom>
+          <a:solidFill>
+            <a:srgbClr val="3A6B7E"/>
+          </a:solidFill>
+          <a:ln>
+            <a:noFill/>
+          </a:ln>
+          <a:effectLst/>
+        </p:spPr>
+        <p:style>
+          <a:lnRef idx="1">
+            <a:schemeClr val="accent1"/>
+          </a:lnRef>
+          <a:fillRef idx="3">
+            <a:schemeClr val="accent1"/>
+          </a:fillRef>
+          <a:effectRef idx="2">
+            <a:schemeClr val="accent1"/>
+          </a:effectRef>
+          <a:fontRef idx="minor">
+            <a:schemeClr val="lt1"/>
+          </a:fontRef>
+        </p:style>
+        <p:txBody>
+          <a:bodyPr rtlCol="0" anchor="ctr"/>
+          <a:lstStyle/>
+          <a:p>
+            <a:pPr algn="ctr"/>
+          </a:p>
+        </p:txBody>
+      </p:sp>
+      <p:sp>
+        <p:nvSpPr>
+          <p:cNvPr id="7" name="TextBox 6"/>
+          <p:cNvSpPr txBox="1"/>
+          <p:nvPr/>
+        </p:nvSpPr>
+        <p:spPr>
+          <a:xfrm>
+            <a:off x="914400" y="2057400"/>
+            <a:ext cx="4846320" cy="566928"/>
+          </a:xfrm>
+          <a:prstGeom prst="rect">
+            <a:avLst/>
+          </a:prstGeom>
+          <a:noFill/>
+        </p:spPr>
+        <p:txBody>
+          <a:bodyPr wrap="square" anchor="ctr">
+            <a:spAutoFit/>
+          </a:bodyPr>
+          <a:lstStyle/>
+          <a:p>
+            <a:pPr algn="l">
+              <a:spcAft>
+                <a:spcPts val="100"/>
+              </a:spcAft>
+            </a:pPr>
+            <a:r>
+              <a:rPr sz="1700" b="1">
+                <a:solidFill>
+                  <a:srgbClr val="FFFFFF"/>
+                </a:solidFill>
+                <a:latin typeface="Calibri"/>
+              </a:rPr>
+              <a:t>1 · Esto vamos a construir</a:t>
+            </a:r>
+          </a:p>
+          <a:p>
+            <a:pPr algn="l">
+              <a:spcAft>
+                <a:spcPts val="100"/>
+              </a:spcAft>
+            </a:pPr>
+            <a:r>
+              <a:rPr sz="1200" b="0">
+                <a:solidFill>
+                  <a:srgbClr val="FDF6EC"/>
+                </a:solidFill>
+                <a:latin typeface="Calibri"/>
+              </a:rPr>
+              <a:t>Mock-up de referencia</a:t>
+            </a:r>
+          </a:p>
+        </p:txBody>
+      </p:sp>
+      <p:sp>
+        <p:nvSpPr>
+          <p:cNvPr id="8" name="Rounded Rectangle 7"/>
+          <p:cNvSpPr/>
+          <p:nvPr/>
+        </p:nvSpPr>
+        <p:spPr>
+          <a:xfrm>
+            <a:off x="2505586" y="2788920"/>
+            <a:ext cx="1654803" cy="3474720"/>
+          </a:xfrm>
+          <a:prstGeom prst="roundRect">
+            <a:avLst/>
+          </a:prstGeom>
+          <a:solidFill>
+            <a:srgbClr val="FFFFFF"/>
+          </a:solidFill>
+          <a:ln w="15240">
+            <a:solidFill>
+              <a:srgbClr val="6D2E46"/>
+            </a:solidFill>
+          </a:ln>
+          <a:effectLst/>
+        </p:spPr>
+        <p:style>
+          <a:lnRef idx="1">
+            <a:schemeClr val="accent1"/>
+          </a:lnRef>
+          <a:fillRef idx="3">
+            <a:schemeClr val="accent1"/>
+          </a:fillRef>
+          <a:effectRef idx="2">
+            <a:schemeClr val="accent1"/>
+          </a:effectRef>
+          <a:fontRef idx="minor">
+            <a:schemeClr val="lt1"/>
+          </a:fontRef>
+        </p:style>
+        <p:txBody>
+          <a:bodyPr rtlCol="0" anchor="ctr"/>
+          <a:lstStyle/>
+          <a:p>
+            <a:pPr algn="ctr"/>
+          </a:p>
+        </p:txBody>
+      </p:sp>
+      <p:pic>
+        <p:nvPicPr>
+          <p:cNvPr id="9" name="Picture 8" descr="ruta-home.png"/>
+          <p:cNvPicPr>
+            <a:picLocks noChangeAspect="1"/>
+          </p:cNvPicPr>
+          <p:nvPr/>
+        </p:nvPicPr>
+        <p:blipFill>
+          <a:blip r:embed="rId2"/>
+          <a:stretch>
+            <a:fillRect/>
+          </a:stretch>
+        </p:blipFill>
+        <p:spPr>
+          <a:xfrm>
+            <a:off x="2551306" y="2834640"/>
+            <a:ext cx="1563363" cy="3383280"/>
+          </a:xfrm>
+          <a:prstGeom prst="rect">
+            <a:avLst/>
+          </a:prstGeom>
+        </p:spPr>
+      </p:pic>
+      <p:sp>
+        <p:nvSpPr>
+          <p:cNvPr id="10" name="TextBox 9"/>
+          <p:cNvSpPr txBox="1"/>
+          <p:nvPr/>
+        </p:nvSpPr>
+        <p:spPr>
+          <a:xfrm>
+            <a:off x="658368" y="6263640"/>
+            <a:ext cx="5349240" cy="457200"/>
+          </a:xfrm>
+          <a:prstGeom prst="rect">
+            <a:avLst/>
+          </a:prstGeom>
+          <a:noFill/>
+        </p:spPr>
+        <p:txBody>
+          <a:bodyPr wrap="square" anchor="t">
+            <a:spAutoFit/>
+          </a:bodyPr>
+          <a:lstStyle/>
+          <a:p>
+            <a:pPr algn="ctr">
+              <a:spcAft>
+                <a:spcPts val="600"/>
+              </a:spcAft>
+            </a:pPr>
+            <a:r>
+              <a:rPr sz="1300" b="1">
+                <a:solidFill>
+                  <a:srgbClr val="6D2E46"/>
+                </a:solidFill>
+                <a:latin typeface="Calibri"/>
+              </a:rPr>
+              <a:t>Lo que diseñamos como referencia</a:t>
+            </a:r>
+          </a:p>
+        </p:txBody>
+      </p:sp>
+      <p:sp>
+        <p:nvSpPr>
+          <p:cNvPr id="11" name="Rounded Rectangle 10"/>
+          <p:cNvSpPr/>
+          <p:nvPr/>
+        </p:nvSpPr>
+        <p:spPr>
+          <a:xfrm>
+            <a:off x="6373368" y="2011680"/>
+            <a:ext cx="5349240" cy="658368"/>
+          </a:xfrm>
+          <a:prstGeom prst="roundRect">
+            <a:avLst/>
+          </a:prstGeom>
+          <a:solidFill>
+            <a:srgbClr val="6D2E46"/>
+          </a:solidFill>
+          <a:ln>
+            <a:noFill/>
+          </a:ln>
+          <a:effectLst/>
+        </p:spPr>
+        <p:style>
+          <a:lnRef idx="1">
+            <a:schemeClr val="accent1"/>
+          </a:lnRef>
+          <a:fillRef idx="3">
+            <a:schemeClr val="accent1"/>
+          </a:fillRef>
+          <a:effectRef idx="2">
+            <a:schemeClr val="accent1"/>
+          </a:effectRef>
+          <a:fontRef idx="minor">
+            <a:schemeClr val="lt1"/>
+          </a:fontRef>
+        </p:style>
+        <p:txBody>
+          <a:bodyPr rtlCol="0" anchor="ctr"/>
+          <a:lstStyle/>
+          <a:p>
+            <a:pPr algn="ctr"/>
+          </a:p>
+        </p:txBody>
+      </p:sp>
+      <p:sp>
+        <p:nvSpPr>
+          <p:cNvPr id="12" name="TextBox 11"/>
+          <p:cNvSpPr txBox="1"/>
+          <p:nvPr/>
+        </p:nvSpPr>
+        <p:spPr>
+          <a:xfrm>
+            <a:off x="6629400" y="2057400"/>
+            <a:ext cx="4846320" cy="566928"/>
+          </a:xfrm>
+          <a:prstGeom prst="rect">
+            <a:avLst/>
+          </a:prstGeom>
+          <a:noFill/>
+        </p:spPr>
+        <p:txBody>
+          <a:bodyPr wrap="square" anchor="ctr">
+            <a:spAutoFit/>
+          </a:bodyPr>
+          <a:lstStyle/>
+          <a:p>
+            <a:pPr algn="l">
+              <a:spcAft>
+                <a:spcPts val="100"/>
+              </a:spcAft>
+            </a:pPr>
+            <a:r>
+              <a:rPr sz="1700" b="1">
+                <a:solidFill>
+                  <a:srgbClr val="FFFFFF"/>
+                </a:solidFill>
+                <a:latin typeface="Calibri"/>
+              </a:rPr>
+              <a:t>2 · Así quedó, generado por la IA</a:t>
+            </a:r>
+          </a:p>
+          <a:p>
+            <a:pPr algn="l">
+              <a:spcAft>
+                <a:spcPts val="100"/>
+              </a:spcAft>
+            </a:pPr>
+            <a:r>
+              <a:rPr sz="1200" b="0">
+                <a:solidFill>
+                  <a:srgbClr val="FDF6EC"/>
+                </a:solidFill>
+                <a:latin typeface="Calibri"/>
+              </a:rPr>
+              <a:t>Captura real de la app</a:t>
+            </a:r>
+          </a:p>
+        </p:txBody>
+      </p:sp>
+      <p:sp>
+        <p:nvSpPr>
+          <p:cNvPr id="13" name="Rounded Rectangle 12"/>
+          <p:cNvSpPr/>
+          <p:nvPr/>
+        </p:nvSpPr>
+        <p:spPr>
+          <a:xfrm>
+            <a:off x="6327648" y="3011980"/>
+            <a:ext cx="5440680" cy="3028599"/>
+          </a:xfrm>
+          <a:prstGeom prst="roundRect">
+            <a:avLst/>
+          </a:prstGeom>
+          <a:solidFill>
+            <a:srgbClr val="FFFFFF"/>
+          </a:solidFill>
+          <a:ln w="15240">
+            <a:solidFill>
+              <a:srgbClr val="6D2E46"/>
+            </a:solidFill>
+          </a:ln>
+          <a:effectLst/>
+        </p:spPr>
+        <p:style>
+          <a:lnRef idx="1">
+            <a:schemeClr val="accent1"/>
+          </a:lnRef>
+          <a:fillRef idx="3">
+            <a:schemeClr val="accent1"/>
+          </a:fillRef>
+          <a:effectRef idx="2">
+            <a:schemeClr val="accent1"/>
+          </a:effectRef>
+          <a:fontRef idx="minor">
+            <a:schemeClr val="lt1"/>
+          </a:fontRef>
+        </p:style>
+        <p:txBody>
+          <a:bodyPr rtlCol="0" anchor="ctr"/>
+          <a:lstStyle/>
+          <a:p>
+            <a:pPr algn="ctr"/>
+          </a:p>
+        </p:txBody>
+      </p:sp>
+      <p:pic>
+        <p:nvPicPr>
+          <p:cNvPr id="14" name="Picture 13" descr="ruta-real.png"/>
+          <p:cNvPicPr>
+            <a:picLocks noChangeAspect="1"/>
+          </p:cNvPicPr>
+          <p:nvPr/>
+        </p:nvPicPr>
+        <p:blipFill>
+          <a:blip r:embed="rId3"/>
+          <a:stretch>
+            <a:fillRect/>
+          </a:stretch>
+        </p:blipFill>
+        <p:spPr>
+          <a:xfrm>
+            <a:off x="6373368" y="3057700"/>
+            <a:ext cx="5349240" cy="2937159"/>
+          </a:xfrm>
+          <a:prstGeom prst="rect">
+            <a:avLst/>
+          </a:prstGeom>
+        </p:spPr>
+      </p:pic>
+      <p:sp>
+        <p:nvSpPr>
+          <p:cNvPr id="15" name="TextBox 14"/>
+          <p:cNvSpPr txBox="1"/>
+          <p:nvPr/>
+        </p:nvSpPr>
+        <p:spPr>
+          <a:xfrm>
+            <a:off x="6373368" y="6263640"/>
+            <a:ext cx="5349240" cy="457200"/>
+          </a:xfrm>
+          <a:prstGeom prst="rect">
+            <a:avLst/>
+          </a:prstGeom>
+          <a:noFill/>
+        </p:spPr>
+        <p:txBody>
+          <a:bodyPr wrap="square" anchor="t">
+            <a:spAutoFit/>
+          </a:bodyPr>
+          <a:lstStyle/>
+          <a:p>
+            <a:pPr algn="ctr">
+              <a:spcAft>
+                <a:spcPts val="600"/>
+              </a:spcAft>
+            </a:pPr>
+            <a:r>
+              <a:rPr sz="1300" b="1">
+                <a:solidFill>
+                  <a:srgbClr val="6D2E46"/>
+                </a:solidFill>
+                <a:latin typeface="Calibri"/>
+              </a:rPr>
+              <a:t>Con datos de Firestore y lista para instalar</a:t>
+            </a:r>
+          </a:p>
+        </p:txBody>
+      </p:sp>
+    </p:spTree>
+  </p:cSld>
+  <p:clrMapOvr>
+    <a:masterClrMapping/>
+  </p:clrMapOvr>
+</p:sld>
+</file>
+
+<file path=ppt/slides/slide12.xml><?xml version="1.0" encoding="utf-8"?>
+<p:sld xmlns:a="http://schemas.openxmlformats.org/drawingml/2006/main" xmlns:p="http://schemas.openxmlformats.org/presentationml/2006/main" xmlns:r="http://schemas.openxmlformats.org/officeDocument/2006/relationships">
+  <p:cSld>
+    <p:bg>
+      <p:bgPr>
+        <a:solidFill>
+          <a:srgbClr val="FDF6EC"/>
+        </a:solidFill>
+        <a:effectLst/>
+      </p:bgPr>
+    </p:bg>
+    <p:spTree>
+      <p:nvGrpSpPr>
+        <p:cNvPr id="1" name=""/>
+        <p:cNvGrpSpPr/>
+        <p:nvPr/>
+      </p:nvGrpSpPr>
+      <p:grpSpPr/>
+      <p:sp>
+        <p:nvSpPr>
+          <p:cNvPr id="2" name="Rounded Rectangle 1"/>
+          <p:cNvSpPr/>
+          <p:nvPr/>
+        </p:nvSpPr>
+        <p:spPr>
+          <a:xfrm>
+            <a:off x="640080" y="640080"/>
+            <a:ext cx="10908792" cy="5577840"/>
+          </a:xfrm>
+          <a:prstGeom prst="roundRect">
+            <a:avLst/>
+          </a:prstGeom>
+          <a:solidFill>
+            <a:srgbClr val="FFFFFF"/>
+          </a:solidFill>
+          <a:ln w="15240">
+            <a:solidFill>
+              <a:srgbClr val="EADDC8"/>
+            </a:solidFill>
+          </a:ln>
+          <a:effectLst/>
+        </p:spPr>
+        <p:style>
+          <a:lnRef idx="1">
+            <a:schemeClr val="accent1"/>
+          </a:lnRef>
+          <a:fillRef idx="3">
+            <a:schemeClr val="accent1"/>
+          </a:fillRef>
+          <a:effectRef idx="2">
+            <a:schemeClr val="accent1"/>
+          </a:effectRef>
+          <a:fontRef idx="minor">
+            <a:schemeClr val="lt1"/>
+          </a:fontRef>
+        </p:style>
+        <p:txBody>
+          <a:bodyPr rtlCol="0" anchor="ctr"/>
+          <a:lstStyle/>
+          <a:p>
+            <a:pPr algn="ctr"/>
+          </a:p>
+        </p:txBody>
+      </p:sp>
+      <p:sp>
+        <p:nvSpPr>
+          <p:cNvPr id="3" name="Rectangle 2"/>
+          <p:cNvSpPr/>
+          <p:nvPr/>
+        </p:nvSpPr>
+        <p:spPr>
+          <a:xfrm>
+            <a:off x="640080" y="640080"/>
+            <a:ext cx="201168" cy="5577840"/>
+          </a:xfrm>
+          <a:prstGeom prst="rect">
+            <a:avLst/>
+          </a:prstGeom>
+          <a:solidFill>
+            <a:srgbClr val="E3B23C"/>
+          </a:solidFill>
+          <a:ln>
+            <a:noFill/>
+          </a:ln>
+          <a:effectLst/>
+        </p:spPr>
+        <p:style>
+          <a:lnRef idx="1">
+            <a:schemeClr val="accent1"/>
+          </a:lnRef>
+          <a:fillRef idx="3">
+            <a:schemeClr val="accent1"/>
+          </a:fillRef>
+          <a:effectRef idx="2">
+            <a:schemeClr val="accent1"/>
+          </a:effectRef>
+          <a:fontRef idx="minor">
+            <a:schemeClr val="lt1"/>
+          </a:fontRef>
+        </p:style>
+        <p:txBody>
+          <a:bodyPr rtlCol="0" anchor="ctr"/>
+          <a:lstStyle/>
+          <a:p>
+            <a:pPr algn="ctr"/>
+          </a:p>
+        </p:txBody>
+      </p:sp>
+      <p:sp>
+        <p:nvSpPr>
+          <p:cNvPr id="4" name="TextBox 3"/>
+          <p:cNvSpPr txBox="1"/>
+          <p:nvPr/>
+        </p:nvSpPr>
+        <p:spPr>
+          <a:xfrm>
+            <a:off x="1051560" y="960120"/>
+            <a:ext cx="10058400" cy="457200"/>
+          </a:xfrm>
+          <a:prstGeom prst="rect">
+            <a:avLst/>
+          </a:prstGeom>
+          <a:noFill/>
+        </p:spPr>
+        <p:txBody>
+          <a:bodyPr wrap="square" anchor="t">
+            <a:spAutoFit/>
+          </a:bodyPr>
+          <a:lstStyle/>
+          <a:p>
+            <a:pPr algn="l">
+              <a:spcAft>
+                <a:spcPts val="600"/>
+              </a:spcAft>
+            </a:pPr>
+            <a:r>
+              <a:rPr sz="2000" b="1">
+                <a:solidFill>
+                  <a:srgbClr val="C84B31"/>
+                </a:solidFill>
+                <a:latin typeface="Calibri"/>
+              </a:rPr>
+              <a:t>LABORATORIO DE HOY</a:t>
+            </a:r>
+          </a:p>
+        </p:txBody>
+      </p:sp>
+      <p:sp>
+        <p:nvSpPr>
+          <p:cNvPr id="5" name="TextBox 4"/>
+          <p:cNvSpPr txBox="1"/>
+          <p:nvPr/>
+        </p:nvSpPr>
+        <p:spPr>
+          <a:xfrm>
+            <a:off x="1051560" y="1463040"/>
+            <a:ext cx="10058400" cy="914400"/>
+          </a:xfrm>
+          <a:prstGeom prst="rect">
+            <a:avLst/>
+          </a:prstGeom>
+          <a:noFill/>
+        </p:spPr>
+        <p:txBody>
+          <a:bodyPr wrap="square" anchor="t">
+            <a:spAutoFit/>
+          </a:bodyPr>
+          <a:lstStyle/>
+          <a:p>
+            <a:pPr algn="l">
+              <a:spcAft>
+                <a:spcPts val="600"/>
+              </a:spcAft>
+            </a:pPr>
+            <a:r>
+              <a:rPr sz="3400" b="1">
+                <a:solidFill>
+                  <a:srgbClr val="6D2E46"/>
+                </a:solidFill>
+                <a:latin typeface="Calibri"/>
+              </a:rPr>
+              <a:t>Laboratorio 3 — PWA con datos, instalable</a:t>
+            </a:r>
+          </a:p>
+        </p:txBody>
+      </p:sp>
+      <p:sp>
+        <p:nvSpPr>
+          <p:cNvPr id="6" name="TextBox 5"/>
+          <p:cNvSpPr txBox="1"/>
+          <p:nvPr/>
+        </p:nvSpPr>
+        <p:spPr>
+          <a:xfrm>
+            <a:off x="1097280" y="2606040"/>
+            <a:ext cx="9875520" cy="3383280"/>
+          </a:xfrm>
+          <a:prstGeom prst="rect">
+            <a:avLst/>
+          </a:prstGeom>
+          <a:noFill/>
+        </p:spPr>
+        <p:txBody>
+          <a:bodyPr wrap="square">
+            <a:spAutoFit/>
+          </a:bodyPr>
+          <a:lstStyle/>
+          <a:p>
+            <a:pPr>
+              <a:spcAft>
+                <a:spcPts val="1500"/>
+              </a:spcAft>
+            </a:pPr>
+            <a:r>
+              <a:rPr sz="2300">
+                <a:solidFill>
+                  <a:srgbClr val="2B2B2B"/>
+                </a:solidFill>
+                <a:latin typeface="Calibri"/>
+              </a:rPr>
+              <a:t>•  Guarda un checkpoint (cambio grande)</a:t>
+            </a:r>
+          </a:p>
+          <a:p>
+            <a:pPr>
+              <a:spcAft>
+                <a:spcPts val="1500"/>
+              </a:spcAft>
+            </a:pPr>
+            <a:r>
+              <a:rPr sz="2300">
+                <a:solidFill>
+                  <a:srgbClr val="2B2B2B"/>
+                </a:solidFill>
+                <a:latin typeface="Calibri"/>
+              </a:rPr>
+              <a:t>•  Conecta tu app a Firestore y aprueba "Enable Firebase"</a:t>
+            </a:r>
+          </a:p>
+          <a:p>
+            <a:pPr>
+              <a:spcAft>
+                <a:spcPts val="1500"/>
+              </a:spcAft>
+            </a:pPr>
+            <a:r>
+              <a:rPr sz="2300">
+                <a:solidFill>
+                  <a:srgbClr val="2B2B2B"/>
+                </a:solidFill>
+                <a:latin typeface="Calibri"/>
+              </a:rPr>
+              <a:t>•  Agrega el formulario para crear registros</a:t>
+            </a:r>
+          </a:p>
+          <a:p>
+            <a:pPr>
+              <a:spcAft>
+                <a:spcPts val="1500"/>
+              </a:spcAft>
+            </a:pPr>
+            <a:r>
+              <a:rPr sz="2300">
+                <a:solidFill>
+                  <a:srgbClr val="2B2B2B"/>
+                </a:solidFill>
+                <a:latin typeface="Calibri"/>
+              </a:rPr>
+              <a:t>•  Verifica que aparece sin recargar (tiempo real)</a:t>
+            </a:r>
+          </a:p>
+          <a:p>
+            <a:pPr>
+              <a:spcAft>
+                <a:spcPts val="1500"/>
+              </a:spcAft>
+            </a:pPr>
+            <a:r>
+              <a:rPr sz="2300">
+                <a:solidFill>
+                  <a:srgbClr val="2B2B2B"/>
+                </a:solidFill>
+                <a:latin typeface="Calibri"/>
+              </a:rPr>
+              <a:t>•  Hazla instalable como PWA y publícala en Cloud Run</a:t>
+            </a:r>
+          </a:p>
+        </p:txBody>
+      </p:sp>
+    </p:spTree>
+  </p:cSld>
+  <p:clrMapOvr>
+    <a:masterClrMapping/>
+  </p:clrMapOvr>
+</p:sld>
+</file>
+
+<file path=ppt/slides/slide13.xml><?xml version="1.0" encoding="utf-8"?>
+<p:sld xmlns:a="http://schemas.openxmlformats.org/drawingml/2006/main" xmlns:p="http://schemas.openxmlformats.org/presentationml/2006/main" xmlns:r="http://schemas.openxmlformats.org/officeDocument/2006/relationships">
+  <p:cSld>
+    <p:bg>
+      <p:bgPr>
+        <a:solidFill>
+          <a:srgbClr val="FDF6EC"/>
+        </a:solidFill>
+        <a:effectLst/>
+      </p:bgPr>
+    </p:bg>
+    <p:spTree>
+      <p:nvGrpSpPr>
+        <p:cNvPr id="1" name=""/>
+        <p:cNvGrpSpPr/>
+        <p:nvPr/>
+      </p:nvGrpSpPr>
+      <p:grpSpPr/>
+      <p:sp>
+        <p:nvSpPr>
+          <p:cNvPr id="2" name="Rectangle 1"/>
+          <p:cNvSpPr/>
+          <p:nvPr/>
+        </p:nvSpPr>
+        <p:spPr>
+          <a:xfrm>
+            <a:off x="0" y="0"/>
+            <a:ext cx="12191695" cy="146304"/>
+          </a:xfrm>
+          <a:prstGeom prst="rect">
+            <a:avLst/>
+          </a:prstGeom>
+          <a:solidFill>
             <a:srgbClr val="6D2E46"/>
           </a:solidFill>
           <a:ln>
@@ -5722,7 +6736,7 @@
                 </a:solidFill>
                 <a:latin typeface="Calibri"/>
               </a:rPr>
-              <a:t>CÓMO FUNCIONA</a:t>
+              <a:t>DEMO DEL DOCENTE · EN VIVO</a:t>
             </a:r>
           </a:p>
         </p:txBody>
@@ -5761,7 +6775,7 @@
                 </a:solidFill>
                 <a:latin typeface="Calibri"/>
               </a:rPr>
-              <a:t>Datos en tiempo real con Firestore</a:t>
+              <a:t>Recetario Rápido</a:t>
             </a:r>
           </a:p>
         </p:txBody>
@@ -5818,8 +6832,201 @@
         </p:nvSpPr>
         <p:spPr>
           <a:xfrm>
-            <a:off x="822960" y="3017520"/>
-            <a:ext cx="3200400" cy="1920240"/>
+            <a:off x="896112" y="2148840"/>
+            <a:ext cx="6583680" cy="566928"/>
+          </a:xfrm>
+          <a:prstGeom prst="roundRect">
+            <a:avLst/>
+          </a:prstGeom>
+          <a:solidFill>
+            <a:srgbClr val="F6ECDD"/>
+          </a:solidFill>
+          <a:ln>
+            <a:noFill/>
+          </a:ln>
+          <a:effectLst/>
+        </p:spPr>
+        <p:style>
+          <a:lnRef idx="1">
+            <a:schemeClr val="accent1"/>
+          </a:lnRef>
+          <a:fillRef idx="3">
+            <a:schemeClr val="accent1"/>
+          </a:fillRef>
+          <a:effectRef idx="2">
+            <a:schemeClr val="accent1"/>
+          </a:effectRef>
+          <a:fontRef idx="minor">
+            <a:schemeClr val="lt1"/>
+          </a:fontRef>
+        </p:style>
+        <p:txBody>
+          <a:bodyPr rtlCol="0" anchor="ctr"/>
+          <a:lstStyle/>
+          <a:p>
+            <a:pPr algn="ctr"/>
+          </a:p>
+        </p:txBody>
+      </p:sp>
+      <p:sp>
+        <p:nvSpPr>
+          <p:cNvPr id="7" name="TextBox 6"/>
+          <p:cNvSpPr txBox="1"/>
+          <p:nvPr/>
+        </p:nvSpPr>
+        <p:spPr>
+          <a:xfrm>
+            <a:off x="1170432" y="2240280"/>
+            <a:ext cx="6035040" cy="457200"/>
+          </a:xfrm>
+          <a:prstGeom prst="rect">
+            <a:avLst/>
+          </a:prstGeom>
+          <a:noFill/>
+        </p:spPr>
+        <p:txBody>
+          <a:bodyPr wrap="square" anchor="ctr">
+            <a:spAutoFit/>
+          </a:bodyPr>
+          <a:lstStyle/>
+          <a:p>
+            <a:pPr algn="l">
+              <a:spcAft>
+                <a:spcPts val="600"/>
+              </a:spcAft>
+            </a:pPr>
+            <a:r>
+              <a:rPr sz="1700" b="1">
+                <a:solidFill>
+                  <a:srgbClr val="6D2E46"/>
+                </a:solidFill>
+                <a:latin typeface="Calibri"/>
+              </a:rPr>
+              <a:t>El docente la construye en vivo — no es tu entrega</a:t>
+            </a:r>
+          </a:p>
+        </p:txBody>
+      </p:sp>
+      <p:sp>
+        <p:nvSpPr>
+          <p:cNvPr id="8" name="TextBox 7"/>
+          <p:cNvSpPr txBox="1"/>
+          <p:nvPr/>
+        </p:nvSpPr>
+        <p:spPr>
+          <a:xfrm>
+            <a:off x="896112" y="2971800"/>
+            <a:ext cx="6583680" cy="2103120"/>
+          </a:xfrm>
+          <a:prstGeom prst="rect">
+            <a:avLst/>
+          </a:prstGeom>
+          <a:noFill/>
+        </p:spPr>
+        <p:txBody>
+          <a:bodyPr wrap="square">
+            <a:spAutoFit/>
+          </a:bodyPr>
+          <a:lstStyle/>
+          <a:p>
+            <a:pPr>
+              <a:spcAft>
+                <a:spcPts val="1400"/>
+              </a:spcAft>
+            </a:pPr>
+            <a:r>
+              <a:rPr sz="2200">
+                <a:solidFill>
+                  <a:srgbClr val="2B2B2B"/>
+                </a:solidFill>
+                <a:latin typeface="Calibri"/>
+              </a:rPr>
+              <a:t>•  Recetas guardadas en la nube con Firestore (PWA)</a:t>
+            </a:r>
+          </a:p>
+          <a:p>
+            <a:pPr>
+              <a:spcAft>
+                <a:spcPts val="1400"/>
+              </a:spcAft>
+            </a:pPr>
+            <a:r>
+              <a:rPr sz="2200">
+                <a:solidFill>
+                  <a:srgbClr val="2B2B2B"/>
+                </a:solidFill>
+                <a:latin typeface="Calibri"/>
+              </a:rPr>
+              <a:t>•  Muestra datos en tiempo real y un formulario para crear registros</a:t>
+            </a:r>
+          </a:p>
+          <a:p>
+            <a:pPr>
+              <a:spcAft>
+                <a:spcPts val="1400"/>
+              </a:spcAft>
+            </a:pPr>
+            <a:r>
+              <a:rPr sz="2200">
+                <a:solidFill>
+                  <a:srgbClr val="2B2B2B"/>
+                </a:solidFill>
+                <a:latin typeface="Calibri"/>
+              </a:rPr>
+              <a:t>•  El docente conecta Firebase en vivo con "Enable Firebase"</a:t>
+            </a:r>
+          </a:p>
+        </p:txBody>
+      </p:sp>
+      <p:sp>
+        <p:nvSpPr>
+          <p:cNvPr id="9" name="TextBox 8"/>
+          <p:cNvSpPr txBox="1"/>
+          <p:nvPr/>
+        </p:nvSpPr>
+        <p:spPr>
+          <a:xfrm>
+            <a:off x="896112" y="5257800"/>
+            <a:ext cx="6583680" cy="1188720"/>
+          </a:xfrm>
+          <a:prstGeom prst="rect">
+            <a:avLst/>
+          </a:prstGeom>
+          <a:noFill/>
+        </p:spPr>
+        <p:txBody>
+          <a:bodyPr wrap="square" anchor="t">
+            <a:spAutoFit/>
+          </a:bodyPr>
+          <a:lstStyle/>
+          <a:p>
+            <a:pPr algn="l">
+              <a:spcAft>
+                <a:spcPts val="600"/>
+              </a:spcAft>
+            </a:pPr>
+            <a:r>
+              <a:rPr sz="1500" b="0">
+                <a:solidFill>
+                  <a:srgbClr val="6F645B"/>
+                </a:solidFill>
+                <a:latin typeface="Calibri"/>
+              </a:rPr>
+              <a:t>Ilustra el concepto del día con una app distinta. Tu laboratorio sigue en la app insignia y en tu propia idea.</a:t>
+            </a:r>
+          </a:p>
+        </p:txBody>
+      </p:sp>
+      <p:sp>
+        <p:nvSpPr>
+          <p:cNvPr id="10" name="Rounded Rectangle 9"/>
+          <p:cNvSpPr/>
+          <p:nvPr/>
+        </p:nvSpPr>
+        <p:spPr>
+          <a:xfrm>
+            <a:off x="7772400" y="3202083"/>
+            <a:ext cx="3749040" cy="2099754"/>
           </a:xfrm>
           <a:prstGeom prst="roundRect">
             <a:avLst/>
@@ -5829,7 +7036,7 @@
           </a:solidFill>
           <a:ln w="15240">
             <a:solidFill>
-              <a:srgbClr val="EADDC8"/>
+              <a:srgbClr val="6D2E46"/>
             </a:solidFill>
           </a:ln>
           <a:effectLst/>
@@ -5856,239 +7063,30 @@
           </a:p>
         </p:txBody>
       </p:sp>
-      <p:sp>
-        <p:nvSpPr>
-          <p:cNvPr id="7" name="Rectangle 6"/>
-          <p:cNvSpPr/>
-          <p:nvPr/>
-        </p:nvSpPr>
-        <p:spPr>
-          <a:xfrm>
-            <a:off x="822960" y="3017520"/>
-            <a:ext cx="3200400" cy="128016"/>
-          </a:xfrm>
-          <a:prstGeom prst="rect">
-            <a:avLst/>
-          </a:prstGeom>
-          <a:solidFill>
-            <a:srgbClr val="6D2E46"/>
-          </a:solidFill>
-          <a:ln>
-            <a:noFill/>
-          </a:ln>
-          <a:effectLst/>
-        </p:spPr>
-        <p:style>
-          <a:lnRef idx="1">
-            <a:schemeClr val="accent1"/>
-          </a:lnRef>
-          <a:fillRef idx="3">
-            <a:schemeClr val="accent1"/>
-          </a:fillRef>
-          <a:effectRef idx="2">
-            <a:schemeClr val="accent1"/>
-          </a:effectRef>
-          <a:fontRef idx="minor">
-            <a:schemeClr val="lt1"/>
-          </a:fontRef>
-        </p:style>
-        <p:txBody>
-          <a:bodyPr rtlCol="0" anchor="ctr"/>
-          <a:lstStyle/>
-          <a:p>
-            <a:pPr algn="ctr"/>
-          </a:p>
-        </p:txBody>
-      </p:sp>
-      <p:sp>
-        <p:nvSpPr>
-          <p:cNvPr id="8" name="TextBox 7"/>
-          <p:cNvSpPr txBox="1"/>
-          <p:nvPr/>
-        </p:nvSpPr>
-        <p:spPr>
-          <a:xfrm>
-            <a:off x="960120" y="3474720"/>
-            <a:ext cx="2926080" cy="1280160"/>
-          </a:xfrm>
-          <a:prstGeom prst="rect">
-            <a:avLst/>
-          </a:prstGeom>
-          <a:noFill/>
-        </p:spPr>
-        <p:txBody>
-          <a:bodyPr wrap="square" anchor="ctr">
-            <a:spAutoFit/>
-          </a:bodyPr>
-          <a:lstStyle/>
-          <a:p>
-            <a:pPr algn="ctr">
-              <a:spcAft>
-                <a:spcPts val="600"/>
-              </a:spcAft>
-            </a:pPr>
-            <a:r>
-              <a:rPr sz="1900" b="1">
-                <a:solidFill>
-                  <a:srgbClr val="6D2E46"/>
-                </a:solidFill>
-                <a:latin typeface="Calibri"/>
-              </a:rPr>
-              <a:t>Firestore</a:t>
-            </a:r>
-          </a:p>
-          <a:p>
-            <a:pPr algn="ctr">
-              <a:spcAft>
-                <a:spcPts val="600"/>
-              </a:spcAft>
-            </a:pPr>
-            <a:r>
-              <a:rPr sz="1400" b="0">
-                <a:solidFill>
-                  <a:srgbClr val="8A7C70"/>
-                </a:solidFill>
-                <a:latin typeface="Calibri"/>
-              </a:rPr>
-              <a:t>datos en la nube</a:t>
-            </a:r>
-          </a:p>
-        </p:txBody>
-      </p:sp>
-      <p:sp>
-        <p:nvSpPr>
-          <p:cNvPr id="9" name="Right Arrow 8"/>
-          <p:cNvSpPr/>
-          <p:nvPr/>
-        </p:nvSpPr>
-        <p:spPr>
-          <a:xfrm>
-            <a:off x="4078224" y="3776472"/>
-            <a:ext cx="393192" cy="402336"/>
-          </a:xfrm>
-          <a:prstGeom prst="rightArrow">
-            <a:avLst/>
-          </a:prstGeom>
-          <a:solidFill>
-            <a:srgbClr val="E3B23C"/>
-          </a:solidFill>
-          <a:ln>
-            <a:noFill/>
-          </a:ln>
-          <a:effectLst/>
-        </p:spPr>
-        <p:style>
-          <a:lnRef idx="1">
-            <a:schemeClr val="accent1"/>
-          </a:lnRef>
-          <a:fillRef idx="3">
-            <a:schemeClr val="accent1"/>
-          </a:fillRef>
-          <a:effectRef idx="2">
-            <a:schemeClr val="accent1"/>
-          </a:effectRef>
-          <a:fontRef idx="minor">
-            <a:schemeClr val="lt1"/>
-          </a:fontRef>
-        </p:style>
-        <p:txBody>
-          <a:bodyPr rtlCol="0" anchor="ctr"/>
-          <a:lstStyle/>
-          <a:p>
-            <a:pPr algn="ctr"/>
-          </a:p>
-        </p:txBody>
-      </p:sp>
-      <p:sp>
-        <p:nvSpPr>
-          <p:cNvPr id="10" name="Rounded Rectangle 9"/>
-          <p:cNvSpPr/>
-          <p:nvPr/>
-        </p:nvSpPr>
-        <p:spPr>
-          <a:xfrm>
-            <a:off x="4526280" y="3017520"/>
-            <a:ext cx="3200400" cy="1920240"/>
-          </a:xfrm>
-          <a:prstGeom prst="roundRect">
-            <a:avLst/>
-          </a:prstGeom>
-          <a:solidFill>
-            <a:srgbClr val="FFFFFF"/>
-          </a:solidFill>
-          <a:ln w="15240">
-            <a:solidFill>
-              <a:srgbClr val="EADDC8"/>
-            </a:solidFill>
-          </a:ln>
-          <a:effectLst/>
-        </p:spPr>
-        <p:style>
-          <a:lnRef idx="1">
-            <a:schemeClr val="accent1"/>
-          </a:lnRef>
-          <a:fillRef idx="3">
-            <a:schemeClr val="accent1"/>
-          </a:fillRef>
-          <a:effectRef idx="2">
-            <a:schemeClr val="accent1"/>
-          </a:effectRef>
-          <a:fontRef idx="minor">
-            <a:schemeClr val="lt1"/>
-          </a:fontRef>
-        </p:style>
-        <p:txBody>
-          <a:bodyPr rtlCol="0" anchor="ctr"/>
-          <a:lstStyle/>
-          <a:p>
-            <a:pPr algn="ctr"/>
-          </a:p>
-        </p:txBody>
-      </p:sp>
-      <p:sp>
-        <p:nvSpPr>
-          <p:cNvPr id="11" name="Rectangle 10"/>
-          <p:cNvSpPr/>
-          <p:nvPr/>
-        </p:nvSpPr>
-        <p:spPr>
-          <a:xfrm>
-            <a:off x="4526280" y="3017520"/>
-            <a:ext cx="3200400" cy="128016"/>
-          </a:xfrm>
-          <a:prstGeom prst="rect">
-            <a:avLst/>
-          </a:prstGeom>
-          <a:solidFill>
-            <a:srgbClr val="C84B31"/>
-          </a:solidFill>
-          <a:ln>
-            <a:noFill/>
-          </a:ln>
-          <a:effectLst/>
-        </p:spPr>
-        <p:style>
-          <a:lnRef idx="1">
-            <a:schemeClr val="accent1"/>
-          </a:lnRef>
-          <a:fillRef idx="3">
-            <a:schemeClr val="accent1"/>
-          </a:fillRef>
-          <a:effectRef idx="2">
-            <a:schemeClr val="accent1"/>
-          </a:effectRef>
-          <a:fontRef idx="minor">
-            <a:schemeClr val="lt1"/>
-          </a:fontRef>
-        </p:style>
-        <p:txBody>
-          <a:bodyPr rtlCol="0" anchor="ctr"/>
-          <a:lstStyle/>
-          <a:p>
-            <a:pPr algn="ctr"/>
-          </a:p>
-        </p:txBody>
-      </p:sp>
+      <p:pic>
+        <p:nvPicPr>
+          <p:cNvPr id="11" name="Picture 10" descr="demo-recetario.png"/>
+          <p:cNvPicPr>
+            <a:picLocks noChangeAspect="1"/>
+          </p:cNvPicPr>
+          <p:nvPr/>
+        </p:nvPicPr>
+        <p:blipFill>
+          <a:blip r:embed="rId2"/>
+          <a:stretch>
+            <a:fillRect/>
+          </a:stretch>
+        </p:blipFill>
+        <p:spPr>
+          <a:xfrm>
+            <a:off x="7818120" y="3247803"/>
+            <a:ext cx="3657600" cy="2008314"/>
+          </a:xfrm>
+          <a:prstGeom prst="rect">
+            <a:avLst/>
+          </a:prstGeom>
+        </p:spPr>
+      </p:pic>
       <p:sp>
         <p:nvSpPr>
           <p:cNvPr id="12" name="TextBox 11"/>
@@ -6097,252 +7095,8 @@
         </p:nvSpPr>
         <p:spPr>
           <a:xfrm>
-            <a:off x="4663440" y="3474720"/>
-            <a:ext cx="2926080" cy="1280160"/>
-          </a:xfrm>
-          <a:prstGeom prst="rect">
-            <a:avLst/>
-          </a:prstGeom>
-          <a:noFill/>
-        </p:spPr>
-        <p:txBody>
-          <a:bodyPr wrap="square" anchor="ctr">
-            <a:spAutoFit/>
-          </a:bodyPr>
-          <a:lstStyle/>
-          <a:p>
-            <a:pPr algn="ctr">
-              <a:spcAft>
-                <a:spcPts val="600"/>
-              </a:spcAft>
-            </a:pPr>
-            <a:r>
-              <a:rPr sz="1900" b="1">
-                <a:solidFill>
-                  <a:srgbClr val="6D2E46"/>
-                </a:solidFill>
-                <a:latin typeface="Calibri"/>
-              </a:rPr>
-              <a:t>onSnapshot</a:t>
-            </a:r>
-          </a:p>
-          <a:p>
-            <a:pPr algn="ctr">
-              <a:spcAft>
-                <a:spcPts val="600"/>
-              </a:spcAft>
-            </a:pPr>
-            <a:r>
-              <a:rPr sz="1400" b="0">
-                <a:solidFill>
-                  <a:srgbClr val="8A7C70"/>
-                </a:solidFill>
-                <a:latin typeface="Calibri"/>
-              </a:rPr>
-              <a:t>escucha cambios</a:t>
-            </a:r>
-          </a:p>
-        </p:txBody>
-      </p:sp>
-      <p:sp>
-        <p:nvSpPr>
-          <p:cNvPr id="13" name="Right Arrow 12"/>
-          <p:cNvSpPr/>
-          <p:nvPr/>
-        </p:nvSpPr>
-        <p:spPr>
-          <a:xfrm>
-            <a:off x="7781544" y="3776472"/>
-            <a:ext cx="393192" cy="402336"/>
-          </a:xfrm>
-          <a:prstGeom prst="rightArrow">
-            <a:avLst/>
-          </a:prstGeom>
-          <a:solidFill>
-            <a:srgbClr val="E3B23C"/>
-          </a:solidFill>
-          <a:ln>
-            <a:noFill/>
-          </a:ln>
-          <a:effectLst/>
-        </p:spPr>
-        <p:style>
-          <a:lnRef idx="1">
-            <a:schemeClr val="accent1"/>
-          </a:lnRef>
-          <a:fillRef idx="3">
-            <a:schemeClr val="accent1"/>
-          </a:fillRef>
-          <a:effectRef idx="2">
-            <a:schemeClr val="accent1"/>
-          </a:effectRef>
-          <a:fontRef idx="minor">
-            <a:schemeClr val="lt1"/>
-          </a:fontRef>
-        </p:style>
-        <p:txBody>
-          <a:bodyPr rtlCol="0" anchor="ctr"/>
-          <a:lstStyle/>
-          <a:p>
-            <a:pPr algn="ctr"/>
-          </a:p>
-        </p:txBody>
-      </p:sp>
-      <p:sp>
-        <p:nvSpPr>
-          <p:cNvPr id="14" name="Rounded Rectangle 13"/>
-          <p:cNvSpPr/>
-          <p:nvPr/>
-        </p:nvSpPr>
-        <p:spPr>
-          <a:xfrm>
-            <a:off x="8229600" y="3017520"/>
-            <a:ext cx="3200400" cy="1920240"/>
-          </a:xfrm>
-          <a:prstGeom prst="roundRect">
-            <a:avLst/>
-          </a:prstGeom>
-          <a:solidFill>
-            <a:srgbClr val="FFFFFF"/>
-          </a:solidFill>
-          <a:ln w="15240">
-            <a:solidFill>
-              <a:srgbClr val="EADDC8"/>
-            </a:solidFill>
-          </a:ln>
-          <a:effectLst/>
-        </p:spPr>
-        <p:style>
-          <a:lnRef idx="1">
-            <a:schemeClr val="accent1"/>
-          </a:lnRef>
-          <a:fillRef idx="3">
-            <a:schemeClr val="accent1"/>
-          </a:fillRef>
-          <a:effectRef idx="2">
-            <a:schemeClr val="accent1"/>
-          </a:effectRef>
-          <a:fontRef idx="minor">
-            <a:schemeClr val="lt1"/>
-          </a:fontRef>
-        </p:style>
-        <p:txBody>
-          <a:bodyPr rtlCol="0" anchor="ctr"/>
-          <a:lstStyle/>
-          <a:p>
-            <a:pPr algn="ctr"/>
-          </a:p>
-        </p:txBody>
-      </p:sp>
-      <p:sp>
-        <p:nvSpPr>
-          <p:cNvPr id="15" name="Rectangle 14"/>
-          <p:cNvSpPr/>
-          <p:nvPr/>
-        </p:nvSpPr>
-        <p:spPr>
-          <a:xfrm>
-            <a:off x="8229600" y="3017520"/>
-            <a:ext cx="3200400" cy="128016"/>
-          </a:xfrm>
-          <a:prstGeom prst="rect">
-            <a:avLst/>
-          </a:prstGeom>
-          <a:solidFill>
-            <a:srgbClr val="4F772D"/>
-          </a:solidFill>
-          <a:ln>
-            <a:noFill/>
-          </a:ln>
-          <a:effectLst/>
-        </p:spPr>
-        <p:style>
-          <a:lnRef idx="1">
-            <a:schemeClr val="accent1"/>
-          </a:lnRef>
-          <a:fillRef idx="3">
-            <a:schemeClr val="accent1"/>
-          </a:fillRef>
-          <a:effectRef idx="2">
-            <a:schemeClr val="accent1"/>
-          </a:effectRef>
-          <a:fontRef idx="minor">
-            <a:schemeClr val="lt1"/>
-          </a:fontRef>
-        </p:style>
-        <p:txBody>
-          <a:bodyPr rtlCol="0" anchor="ctr"/>
-          <a:lstStyle/>
-          <a:p>
-            <a:pPr algn="ctr"/>
-          </a:p>
-        </p:txBody>
-      </p:sp>
-      <p:sp>
-        <p:nvSpPr>
-          <p:cNvPr id="16" name="TextBox 15"/>
-          <p:cNvSpPr txBox="1"/>
-          <p:nvPr/>
-        </p:nvSpPr>
-        <p:spPr>
-          <a:xfrm>
-            <a:off x="8366760" y="3474720"/>
-            <a:ext cx="2926080" cy="1280160"/>
-          </a:xfrm>
-          <a:prstGeom prst="rect">
-            <a:avLst/>
-          </a:prstGeom>
-          <a:noFill/>
-        </p:spPr>
-        <p:txBody>
-          <a:bodyPr wrap="square" anchor="ctr">
-            <a:spAutoFit/>
-          </a:bodyPr>
-          <a:lstStyle/>
-          <a:p>
-            <a:pPr algn="ctr">
-              <a:spcAft>
-                <a:spcPts val="600"/>
-              </a:spcAft>
-            </a:pPr>
-            <a:r>
-              <a:rPr sz="1900" b="1">
-                <a:solidFill>
-                  <a:srgbClr val="6D2E46"/>
-                </a:solidFill>
-                <a:latin typeface="Calibri"/>
-              </a:rPr>
-              <a:t>La app</a:t>
-            </a:r>
-          </a:p>
-          <a:p>
-            <a:pPr algn="ctr">
-              <a:spcAft>
-                <a:spcPts val="600"/>
-              </a:spcAft>
-            </a:pPr>
-            <a:r>
-              <a:rPr sz="1400" b="0">
-                <a:solidFill>
-                  <a:srgbClr val="8A7C70"/>
-                </a:solidFill>
-                <a:latin typeface="Calibri"/>
-              </a:rPr>
-              <a:t>se actualiza sola</a:t>
-            </a:r>
-          </a:p>
-        </p:txBody>
-      </p:sp>
-      <p:sp>
-        <p:nvSpPr>
-          <p:cNvPr id="17" name="TextBox 16"/>
-          <p:cNvSpPr txBox="1"/>
-          <p:nvPr/>
-        </p:nvSpPr>
-        <p:spPr>
-          <a:xfrm>
-            <a:off x="868680" y="5394960"/>
-            <a:ext cx="10424160" cy="731520"/>
+            <a:off x="7818120" y="6419088"/>
+            <a:ext cx="3657600" cy="365760"/>
           </a:xfrm>
           <a:prstGeom prst="rect">
             <a:avLst/>
@@ -6355,19 +7109,19 @@
           </a:bodyPr>
           <a:lstStyle/>
           <a:p>
-            <a:pPr algn="l">
+            <a:pPr algn="ctr">
               <a:spcAft>
                 <a:spcPts val="600"/>
               </a:spcAft>
             </a:pPr>
             <a:r>
-              <a:rPr sz="1700" b="0">
-                <a:solidFill>
-                  <a:srgbClr val="2B2B2B"/>
-                </a:solidFill>
-                <a:latin typeface="Calibri"/>
-              </a:rPr>
-              <a:t>Cuando alguien crea o edita un dato, la pantalla se refresca sin recargar. El contenido va en español; los campos en inglés (nombre, zona, categoria...).</a:t>
+              <a:rPr sz="1200" b="1">
+                <a:solidFill>
+                  <a:srgbClr val="6D2E46"/>
+                </a:solidFill>
+                <a:latin typeface="Calibri"/>
+              </a:rPr>
+              <a:t>Captura real de la demo</a:t>
             </a:r>
           </a:p>
         </p:txBody>
@@ -6476,7 +7230,7 @@
                 </a:solidFill>
                 <a:latin typeface="Calibri"/>
               </a:rPr>
-              <a:t>TRES PIEZAS + PUBLICACIÓN</a:t>
+              <a:t>CÓMO FUNCIONA</a:t>
             </a:r>
           </a:p>
         </p:txBody>
@@ -6515,7 +7269,7 @@
                 </a:solidFill>
                 <a:latin typeface="Calibri"/>
               </a:rPr>
-              <a:t>Qué hace instalable a una PWA</a:t>
+              <a:t>Datos en tiempo real con Firestore</a:t>
             </a:r>
           </a:p>
         </p:txBody>
@@ -6573,7 +7327,7 @@
         <p:spPr>
           <a:xfrm>
             <a:off x="822960" y="3017520"/>
-            <a:ext cx="2274570" cy="1920240"/>
+            <a:ext cx="3200400" cy="1920240"/>
           </a:xfrm>
           <a:prstGeom prst="roundRect">
             <a:avLst/>
@@ -6619,7 +7373,7 @@
         <p:spPr>
           <a:xfrm>
             <a:off x="822960" y="3017520"/>
-            <a:ext cx="2274570" cy="128016"/>
+            <a:ext cx="3200400" cy="128016"/>
           </a:xfrm>
           <a:prstGeom prst="rect">
             <a:avLst/>
@@ -6663,7 +7417,7 @@
         <p:spPr>
           <a:xfrm>
             <a:off x="960120" y="3474720"/>
-            <a:ext cx="2000250" cy="1280160"/>
+            <a:ext cx="2926080" cy="1280160"/>
           </a:xfrm>
           <a:prstGeom prst="rect">
             <a:avLst/>
@@ -6688,7 +7442,7 @@
                 </a:solidFill>
                 <a:latin typeface="Calibri"/>
               </a:rPr>
-              <a:t>Manifest</a:t>
+              <a:t>Firestore</a:t>
             </a:r>
           </a:p>
           <a:p>
@@ -6700,11 +7454,11 @@
             <a:r>
               <a:rPr sz="1400" b="0">
                 <a:solidFill>
-                  <a:srgbClr val="8A7C70"/>
-                </a:solidFill>
-                <a:latin typeface="Calibri"/>
-              </a:rPr>
-              <a:t>nombre, colores</a:t>
+                  <a:srgbClr val="6F645B"/>
+                </a:solidFill>
+                <a:latin typeface="Calibri"/>
+              </a:rPr>
+              <a:t>datos en la nube</a:t>
             </a:r>
           </a:p>
         </p:txBody>
@@ -6717,7 +7471,7 @@
         </p:nvSpPr>
         <p:spPr>
           <a:xfrm>
-            <a:off x="3152394" y="3776472"/>
+            <a:off x="4078224" y="3776472"/>
             <a:ext cx="393192" cy="402336"/>
           </a:xfrm>
           <a:prstGeom prst="rightArrow">
@@ -6761,8 +7515,8 @@
         </p:nvSpPr>
         <p:spPr>
           <a:xfrm>
-            <a:off x="3600450" y="3017520"/>
-            <a:ext cx="2274570" cy="1920240"/>
+            <a:off x="4526280" y="3017520"/>
+            <a:ext cx="3200400" cy="1920240"/>
           </a:xfrm>
           <a:prstGeom prst="roundRect">
             <a:avLst/>
@@ -6807,8 +7561,8 @@
         </p:nvSpPr>
         <p:spPr>
           <a:xfrm>
-            <a:off x="3600450" y="3017520"/>
-            <a:ext cx="2274570" cy="128016"/>
+            <a:off x="4526280" y="3017520"/>
+            <a:ext cx="3200400" cy="128016"/>
           </a:xfrm>
           <a:prstGeom prst="rect">
             <a:avLst/>
@@ -6851,8 +7605,8 @@
         </p:nvSpPr>
         <p:spPr>
           <a:xfrm>
-            <a:off x="3737610" y="3474720"/>
-            <a:ext cx="2000250" cy="1280160"/>
+            <a:off x="4663440" y="3474720"/>
+            <a:ext cx="2926080" cy="1280160"/>
           </a:xfrm>
           <a:prstGeom prst="rect">
             <a:avLst/>
@@ -6877,7 +7631,7 @@
                 </a:solidFill>
                 <a:latin typeface="Calibri"/>
               </a:rPr>
-              <a:t>Íconos</a:t>
+              <a:t>onSnapshot</a:t>
             </a:r>
           </a:p>
           <a:p>
@@ -6889,11 +7643,11 @@
             <a:r>
               <a:rPr sz="1400" b="0">
                 <a:solidFill>
-                  <a:srgbClr val="8A7C70"/>
-                </a:solidFill>
-                <a:latin typeface="Calibri"/>
-              </a:rPr>
-              <a:t>varios tamaños</a:t>
+                  <a:srgbClr val="6F645B"/>
+                </a:solidFill>
+                <a:latin typeface="Calibri"/>
+              </a:rPr>
+              <a:t>escucha cambios</a:t>
             </a:r>
           </a:p>
         </p:txBody>
@@ -6906,7 +7660,7 @@
         </p:nvSpPr>
         <p:spPr>
           <a:xfrm>
-            <a:off x="5929884" y="3776472"/>
+            <a:off x="7781544" y="3776472"/>
             <a:ext cx="393192" cy="402336"/>
           </a:xfrm>
           <a:prstGeom prst="rightArrow">
@@ -6950,8 +7704,8 @@
         </p:nvSpPr>
         <p:spPr>
           <a:xfrm>
-            <a:off x="6377940" y="3017520"/>
-            <a:ext cx="2274570" cy="1920240"/>
+            <a:off x="8229600" y="3017520"/>
+            <a:ext cx="3200400" cy="1920240"/>
           </a:xfrm>
           <a:prstGeom prst="roundRect">
             <a:avLst/>
@@ -6996,8 +7750,8 @@
         </p:nvSpPr>
         <p:spPr>
           <a:xfrm>
-            <a:off x="6377940" y="3017520"/>
-            <a:ext cx="2274570" cy="128016"/>
+            <a:off x="8229600" y="3017520"/>
+            <a:ext cx="3200400" cy="128016"/>
           </a:xfrm>
           <a:prstGeom prst="rect">
             <a:avLst/>
@@ -7040,8 +7794,8 @@
         </p:nvSpPr>
         <p:spPr>
           <a:xfrm>
-            <a:off x="6515100" y="3474720"/>
-            <a:ext cx="2000250" cy="1280160"/>
+            <a:off x="8366760" y="3474720"/>
+            <a:ext cx="2926080" cy="1280160"/>
           </a:xfrm>
           <a:prstGeom prst="rect">
             <a:avLst/>
@@ -7066,7 +7820,7 @@
                 </a:solidFill>
                 <a:latin typeface="Calibri"/>
               </a:rPr>
-              <a:t>Service Worker</a:t>
+              <a:t>La app</a:t>
             </a:r>
           </a:p>
           <a:p>
@@ -7078,207 +7832,18 @@
             <a:r>
               <a:rPr sz="1400" b="0">
                 <a:solidFill>
-                  <a:srgbClr val="8A7C70"/>
-                </a:solidFill>
-                <a:latin typeface="Calibri"/>
-              </a:rPr>
-              <a:t>sin conexión</a:t>
-            </a:r>
-          </a:p>
-        </p:txBody>
-      </p:sp>
-      <p:sp>
-        <p:nvSpPr>
-          <p:cNvPr id="17" name="Right Arrow 16"/>
-          <p:cNvSpPr/>
-          <p:nvPr/>
-        </p:nvSpPr>
-        <p:spPr>
-          <a:xfrm>
-            <a:off x="8707374" y="3776472"/>
-            <a:ext cx="393192" cy="402336"/>
-          </a:xfrm>
-          <a:prstGeom prst="rightArrow">
-            <a:avLst/>
-          </a:prstGeom>
-          <a:solidFill>
-            <a:srgbClr val="E3B23C"/>
-          </a:solidFill>
-          <a:ln>
-            <a:noFill/>
-          </a:ln>
-          <a:effectLst/>
-        </p:spPr>
-        <p:style>
-          <a:lnRef idx="1">
-            <a:schemeClr val="accent1"/>
-          </a:lnRef>
-          <a:fillRef idx="3">
-            <a:schemeClr val="accent1"/>
-          </a:fillRef>
-          <a:effectRef idx="2">
-            <a:schemeClr val="accent1"/>
-          </a:effectRef>
-          <a:fontRef idx="minor">
-            <a:schemeClr val="lt1"/>
-          </a:fontRef>
-        </p:style>
-        <p:txBody>
-          <a:bodyPr rtlCol="0" anchor="ctr"/>
-          <a:lstStyle/>
-          <a:p>
-            <a:pPr algn="ctr"/>
-          </a:p>
-        </p:txBody>
-      </p:sp>
-      <p:sp>
-        <p:nvSpPr>
-          <p:cNvPr id="18" name="Rounded Rectangle 17"/>
-          <p:cNvSpPr/>
-          <p:nvPr/>
-        </p:nvSpPr>
-        <p:spPr>
-          <a:xfrm>
-            <a:off x="9155430" y="3017520"/>
-            <a:ext cx="2274570" cy="1920240"/>
-          </a:xfrm>
-          <a:prstGeom prst="roundRect">
-            <a:avLst/>
-          </a:prstGeom>
-          <a:solidFill>
-            <a:srgbClr val="FFFFFF"/>
-          </a:solidFill>
-          <a:ln w="15240">
-            <a:solidFill>
-              <a:srgbClr val="EADDC8"/>
-            </a:solidFill>
-          </a:ln>
-          <a:effectLst/>
-        </p:spPr>
-        <p:style>
-          <a:lnRef idx="1">
-            <a:schemeClr val="accent1"/>
-          </a:lnRef>
-          <a:fillRef idx="3">
-            <a:schemeClr val="accent1"/>
-          </a:fillRef>
-          <a:effectRef idx="2">
-            <a:schemeClr val="accent1"/>
-          </a:effectRef>
-          <a:fontRef idx="minor">
-            <a:schemeClr val="lt1"/>
-          </a:fontRef>
-        </p:style>
-        <p:txBody>
-          <a:bodyPr rtlCol="0" anchor="ctr"/>
-          <a:lstStyle/>
-          <a:p>
-            <a:pPr algn="ctr"/>
-          </a:p>
-        </p:txBody>
-      </p:sp>
-      <p:sp>
-        <p:nvSpPr>
-          <p:cNvPr id="19" name="Rectangle 18"/>
-          <p:cNvSpPr/>
-          <p:nvPr/>
-        </p:nvSpPr>
-        <p:spPr>
-          <a:xfrm>
-            <a:off x="9155430" y="3017520"/>
-            <a:ext cx="2274570" cy="128016"/>
-          </a:xfrm>
-          <a:prstGeom prst="rect">
-            <a:avLst/>
-          </a:prstGeom>
-          <a:solidFill>
-            <a:srgbClr val="3A6B7E"/>
-          </a:solidFill>
-          <a:ln>
-            <a:noFill/>
-          </a:ln>
-          <a:effectLst/>
-        </p:spPr>
-        <p:style>
-          <a:lnRef idx="1">
-            <a:schemeClr val="accent1"/>
-          </a:lnRef>
-          <a:fillRef idx="3">
-            <a:schemeClr val="accent1"/>
-          </a:fillRef>
-          <a:effectRef idx="2">
-            <a:schemeClr val="accent1"/>
-          </a:effectRef>
-          <a:fontRef idx="minor">
-            <a:schemeClr val="lt1"/>
-          </a:fontRef>
-        </p:style>
-        <p:txBody>
-          <a:bodyPr rtlCol="0" anchor="ctr"/>
-          <a:lstStyle/>
-          <a:p>
-            <a:pPr algn="ctr"/>
-          </a:p>
-        </p:txBody>
-      </p:sp>
-      <p:sp>
-        <p:nvSpPr>
-          <p:cNvPr id="20" name="TextBox 19"/>
-          <p:cNvSpPr txBox="1"/>
-          <p:nvPr/>
-        </p:nvSpPr>
-        <p:spPr>
-          <a:xfrm>
-            <a:off x="9292590" y="3474720"/>
-            <a:ext cx="2000250" cy="1280160"/>
-          </a:xfrm>
-          <a:prstGeom prst="rect">
-            <a:avLst/>
-          </a:prstGeom>
-          <a:noFill/>
-        </p:spPr>
-        <p:txBody>
-          <a:bodyPr wrap="square" anchor="ctr">
-            <a:spAutoFit/>
-          </a:bodyPr>
-          <a:lstStyle/>
-          <a:p>
-            <a:pPr algn="ctr">
-              <a:spcAft>
-                <a:spcPts val="600"/>
-              </a:spcAft>
-            </a:pPr>
-            <a:r>
-              <a:rPr sz="1900" b="1">
-                <a:solidFill>
-                  <a:srgbClr val="6D2E46"/>
-                </a:solidFill>
-                <a:latin typeface="Calibri"/>
-              </a:rPr>
-              <a:t>Cloud Run</a:t>
-            </a:r>
-          </a:p>
-          <a:p>
-            <a:pPr algn="ctr">
-              <a:spcAft>
-                <a:spcPts val="600"/>
-              </a:spcAft>
-            </a:pPr>
-            <a:r>
-              <a:rPr sz="1400" b="0">
-                <a:solidFill>
-                  <a:srgbClr val="8A7C70"/>
-                </a:solidFill>
-                <a:latin typeface="Calibri"/>
-              </a:rPr>
-              <a:t>URL para instalar</a:t>
-            </a:r>
-          </a:p>
-        </p:txBody>
-      </p:sp>
-      <p:sp>
-        <p:nvSpPr>
-          <p:cNvPr id="21" name="TextBox 20"/>
+                  <a:srgbClr val="6F645B"/>
+                </a:solidFill>
+                <a:latin typeface="Calibri"/>
+              </a:rPr>
+              <a:t>se actualiza sola</a:t>
+            </a:r>
+          </a:p>
+        </p:txBody>
+      </p:sp>
+      <p:sp>
+        <p:nvSpPr>
+          <p:cNvPr id="17" name="TextBox 16"/>
           <p:cNvSpPr txBox="1"/>
           <p:nvPr/>
         </p:nvSpPr>
@@ -7310,7 +7875,7 @@
                 </a:solidFill>
                 <a:latin typeface="Calibri"/>
               </a:rPr>
-              <a:t>Con esas tres piezas el teléfono ofrece "Instalar". Cloud Run publica tu app con una dirección https propia.</a:t>
+              <a:t>Cuando alguien crea o edita un dato, la pantalla se refresca sin recargar. El contenido va en español; los campos en inglés (nombre, zona, categoria...).</a:t>
             </a:r>
           </a:p>
         </p:txBody>
@@ -7356,7 +7921,7 @@
             <a:avLst/>
           </a:prstGeom>
           <a:solidFill>
-            <a:srgbClr val="C84B31"/>
+            <a:srgbClr val="4F772D"/>
           </a:solidFill>
           <a:ln>
             <a:noFill/>
@@ -7419,7 +7984,7 @@
                 </a:solidFill>
                 <a:latin typeface="Calibri"/>
               </a:rPr>
-              <a:t>A DÓNDE LLEGAMOS</a:t>
+              <a:t>TRES PIEZAS + PUBLICACIÓN</a:t>
             </a:r>
           </a:p>
         </p:txBody>
@@ -7458,7 +8023,7 @@
                 </a:solidFill>
                 <a:latin typeface="Calibri"/>
               </a:rPr>
-              <a:t>Ruta del Café: con datos y lista para instalar</a:t>
+              <a:t>Qué hace instalable a una PWA</a:t>
             </a:r>
           </a:p>
         </p:txBody>
@@ -7515,8 +8080,8 @@
         </p:nvSpPr>
         <p:spPr>
           <a:xfrm>
-            <a:off x="9134856" y="1819655"/>
-            <a:ext cx="2053369" cy="4315968"/>
+            <a:off x="822960" y="3017520"/>
+            <a:ext cx="2274570" cy="1920240"/>
           </a:xfrm>
           <a:prstGeom prst="roundRect">
             <a:avLst/>
@@ -7526,7 +8091,7 @@
           </a:solidFill>
           <a:ln w="15240">
             <a:solidFill>
-              <a:srgbClr val="6D2E46"/>
+              <a:srgbClr val="EADDC8"/>
             </a:solidFill>
           </a:ln>
           <a:effectLst/>
@@ -7553,30 +8118,50 @@
           </a:p>
         </p:txBody>
       </p:sp>
-      <p:pic>
-        <p:nvPicPr>
-          <p:cNvPr id="7" name="Picture 6" descr="ruta-home.png"/>
-          <p:cNvPicPr>
-            <a:picLocks noChangeAspect="1"/>
-          </p:cNvPicPr>
-          <p:nvPr/>
-        </p:nvPicPr>
-        <p:blipFill>
-          <a:blip r:embed="rId2"/>
-          <a:stretch>
-            <a:fillRect/>
-          </a:stretch>
-        </p:blipFill>
-        <p:spPr>
-          <a:xfrm>
-            <a:off x="9189720" y="1874519"/>
-            <a:ext cx="1943642" cy="4206240"/>
-          </a:xfrm>
-          <a:prstGeom prst="rect">
-            <a:avLst/>
-          </a:prstGeom>
-        </p:spPr>
-      </p:pic>
+      <p:sp>
+        <p:nvSpPr>
+          <p:cNvPr id="7" name="Rectangle 6"/>
+          <p:cNvSpPr/>
+          <p:nvPr/>
+        </p:nvSpPr>
+        <p:spPr>
+          <a:xfrm>
+            <a:off x="822960" y="3017520"/>
+            <a:ext cx="2274570" cy="128016"/>
+          </a:xfrm>
+          <a:prstGeom prst="rect">
+            <a:avLst/>
+          </a:prstGeom>
+          <a:solidFill>
+            <a:srgbClr val="6D2E46"/>
+          </a:solidFill>
+          <a:ln>
+            <a:noFill/>
+          </a:ln>
+          <a:effectLst/>
+        </p:spPr>
+        <p:style>
+          <a:lnRef idx="1">
+            <a:schemeClr val="accent1"/>
+          </a:lnRef>
+          <a:fillRef idx="3">
+            <a:schemeClr val="accent1"/>
+          </a:fillRef>
+          <a:effectRef idx="2">
+            <a:schemeClr val="accent1"/>
+          </a:effectRef>
+          <a:fontRef idx="minor">
+            <a:schemeClr val="lt1"/>
+          </a:fontRef>
+        </p:style>
+        <p:txBody>
+          <a:bodyPr rtlCol="0" anchor="ctr"/>
+          <a:lstStyle/>
+          <a:p>
+            <a:pPr algn="ctr"/>
+          </a:p>
+        </p:txBody>
+      </p:sp>
       <p:sp>
         <p:nvSpPr>
           <p:cNvPr id="8" name="TextBox 7"/>
@@ -7585,8 +8170,630 @@
         </p:nvSpPr>
         <p:spPr>
           <a:xfrm>
-            <a:off x="8366760" y="6208775"/>
-            <a:ext cx="3589561" cy="457200"/>
+            <a:off x="960120" y="3474720"/>
+            <a:ext cx="2000250" cy="1280160"/>
+          </a:xfrm>
+          <a:prstGeom prst="rect">
+            <a:avLst/>
+          </a:prstGeom>
+          <a:noFill/>
+        </p:spPr>
+        <p:txBody>
+          <a:bodyPr wrap="square" anchor="ctr">
+            <a:spAutoFit/>
+          </a:bodyPr>
+          <a:lstStyle/>
+          <a:p>
+            <a:pPr algn="ctr">
+              <a:spcAft>
+                <a:spcPts val="600"/>
+              </a:spcAft>
+            </a:pPr>
+            <a:r>
+              <a:rPr sz="1900" b="1">
+                <a:solidFill>
+                  <a:srgbClr val="6D2E46"/>
+                </a:solidFill>
+                <a:latin typeface="Calibri"/>
+              </a:rPr>
+              <a:t>Manifest</a:t>
+            </a:r>
+          </a:p>
+          <a:p>
+            <a:pPr algn="ctr">
+              <a:spcAft>
+                <a:spcPts val="600"/>
+              </a:spcAft>
+            </a:pPr>
+            <a:r>
+              <a:rPr sz="1400" b="0">
+                <a:solidFill>
+                  <a:srgbClr val="6F645B"/>
+                </a:solidFill>
+                <a:latin typeface="Calibri"/>
+              </a:rPr>
+              <a:t>nombre, colores</a:t>
+            </a:r>
+          </a:p>
+        </p:txBody>
+      </p:sp>
+      <p:sp>
+        <p:nvSpPr>
+          <p:cNvPr id="9" name="Right Arrow 8"/>
+          <p:cNvSpPr/>
+          <p:nvPr/>
+        </p:nvSpPr>
+        <p:spPr>
+          <a:xfrm>
+            <a:off x="3152394" y="3776472"/>
+            <a:ext cx="393192" cy="402336"/>
+          </a:xfrm>
+          <a:prstGeom prst="rightArrow">
+            <a:avLst/>
+          </a:prstGeom>
+          <a:solidFill>
+            <a:srgbClr val="E3B23C"/>
+          </a:solidFill>
+          <a:ln>
+            <a:noFill/>
+          </a:ln>
+          <a:effectLst/>
+        </p:spPr>
+        <p:style>
+          <a:lnRef idx="1">
+            <a:schemeClr val="accent1"/>
+          </a:lnRef>
+          <a:fillRef idx="3">
+            <a:schemeClr val="accent1"/>
+          </a:fillRef>
+          <a:effectRef idx="2">
+            <a:schemeClr val="accent1"/>
+          </a:effectRef>
+          <a:fontRef idx="minor">
+            <a:schemeClr val="lt1"/>
+          </a:fontRef>
+        </p:style>
+        <p:txBody>
+          <a:bodyPr rtlCol="0" anchor="ctr"/>
+          <a:lstStyle/>
+          <a:p>
+            <a:pPr algn="ctr"/>
+          </a:p>
+        </p:txBody>
+      </p:sp>
+      <p:sp>
+        <p:nvSpPr>
+          <p:cNvPr id="10" name="Rounded Rectangle 9"/>
+          <p:cNvSpPr/>
+          <p:nvPr/>
+        </p:nvSpPr>
+        <p:spPr>
+          <a:xfrm>
+            <a:off x="3600450" y="3017520"/>
+            <a:ext cx="2274570" cy="1920240"/>
+          </a:xfrm>
+          <a:prstGeom prst="roundRect">
+            <a:avLst/>
+          </a:prstGeom>
+          <a:solidFill>
+            <a:srgbClr val="FFFFFF"/>
+          </a:solidFill>
+          <a:ln w="15240">
+            <a:solidFill>
+              <a:srgbClr val="EADDC8"/>
+            </a:solidFill>
+          </a:ln>
+          <a:effectLst/>
+        </p:spPr>
+        <p:style>
+          <a:lnRef idx="1">
+            <a:schemeClr val="accent1"/>
+          </a:lnRef>
+          <a:fillRef idx="3">
+            <a:schemeClr val="accent1"/>
+          </a:fillRef>
+          <a:effectRef idx="2">
+            <a:schemeClr val="accent1"/>
+          </a:effectRef>
+          <a:fontRef idx="minor">
+            <a:schemeClr val="lt1"/>
+          </a:fontRef>
+        </p:style>
+        <p:txBody>
+          <a:bodyPr rtlCol="0" anchor="ctr"/>
+          <a:lstStyle/>
+          <a:p>
+            <a:pPr algn="ctr"/>
+          </a:p>
+        </p:txBody>
+      </p:sp>
+      <p:sp>
+        <p:nvSpPr>
+          <p:cNvPr id="11" name="Rectangle 10"/>
+          <p:cNvSpPr/>
+          <p:nvPr/>
+        </p:nvSpPr>
+        <p:spPr>
+          <a:xfrm>
+            <a:off x="3600450" y="3017520"/>
+            <a:ext cx="2274570" cy="128016"/>
+          </a:xfrm>
+          <a:prstGeom prst="rect">
+            <a:avLst/>
+          </a:prstGeom>
+          <a:solidFill>
+            <a:srgbClr val="C84B31"/>
+          </a:solidFill>
+          <a:ln>
+            <a:noFill/>
+          </a:ln>
+          <a:effectLst/>
+        </p:spPr>
+        <p:style>
+          <a:lnRef idx="1">
+            <a:schemeClr val="accent1"/>
+          </a:lnRef>
+          <a:fillRef idx="3">
+            <a:schemeClr val="accent1"/>
+          </a:fillRef>
+          <a:effectRef idx="2">
+            <a:schemeClr val="accent1"/>
+          </a:effectRef>
+          <a:fontRef idx="minor">
+            <a:schemeClr val="lt1"/>
+          </a:fontRef>
+        </p:style>
+        <p:txBody>
+          <a:bodyPr rtlCol="0" anchor="ctr"/>
+          <a:lstStyle/>
+          <a:p>
+            <a:pPr algn="ctr"/>
+          </a:p>
+        </p:txBody>
+      </p:sp>
+      <p:sp>
+        <p:nvSpPr>
+          <p:cNvPr id="12" name="TextBox 11"/>
+          <p:cNvSpPr txBox="1"/>
+          <p:nvPr/>
+        </p:nvSpPr>
+        <p:spPr>
+          <a:xfrm>
+            <a:off x="3737610" y="3474720"/>
+            <a:ext cx="2000250" cy="1280160"/>
+          </a:xfrm>
+          <a:prstGeom prst="rect">
+            <a:avLst/>
+          </a:prstGeom>
+          <a:noFill/>
+        </p:spPr>
+        <p:txBody>
+          <a:bodyPr wrap="square" anchor="ctr">
+            <a:spAutoFit/>
+          </a:bodyPr>
+          <a:lstStyle/>
+          <a:p>
+            <a:pPr algn="ctr">
+              <a:spcAft>
+                <a:spcPts val="600"/>
+              </a:spcAft>
+            </a:pPr>
+            <a:r>
+              <a:rPr sz="1900" b="1">
+                <a:solidFill>
+                  <a:srgbClr val="6D2E46"/>
+                </a:solidFill>
+                <a:latin typeface="Calibri"/>
+              </a:rPr>
+              <a:t>Íconos</a:t>
+            </a:r>
+          </a:p>
+          <a:p>
+            <a:pPr algn="ctr">
+              <a:spcAft>
+                <a:spcPts val="600"/>
+              </a:spcAft>
+            </a:pPr>
+            <a:r>
+              <a:rPr sz="1400" b="0">
+                <a:solidFill>
+                  <a:srgbClr val="6F645B"/>
+                </a:solidFill>
+                <a:latin typeface="Calibri"/>
+              </a:rPr>
+              <a:t>varios tamaños</a:t>
+            </a:r>
+          </a:p>
+        </p:txBody>
+      </p:sp>
+      <p:sp>
+        <p:nvSpPr>
+          <p:cNvPr id="13" name="Right Arrow 12"/>
+          <p:cNvSpPr/>
+          <p:nvPr/>
+        </p:nvSpPr>
+        <p:spPr>
+          <a:xfrm>
+            <a:off x="5929884" y="3776472"/>
+            <a:ext cx="393192" cy="402336"/>
+          </a:xfrm>
+          <a:prstGeom prst="rightArrow">
+            <a:avLst/>
+          </a:prstGeom>
+          <a:solidFill>
+            <a:srgbClr val="E3B23C"/>
+          </a:solidFill>
+          <a:ln>
+            <a:noFill/>
+          </a:ln>
+          <a:effectLst/>
+        </p:spPr>
+        <p:style>
+          <a:lnRef idx="1">
+            <a:schemeClr val="accent1"/>
+          </a:lnRef>
+          <a:fillRef idx="3">
+            <a:schemeClr val="accent1"/>
+          </a:fillRef>
+          <a:effectRef idx="2">
+            <a:schemeClr val="accent1"/>
+          </a:effectRef>
+          <a:fontRef idx="minor">
+            <a:schemeClr val="lt1"/>
+          </a:fontRef>
+        </p:style>
+        <p:txBody>
+          <a:bodyPr rtlCol="0" anchor="ctr"/>
+          <a:lstStyle/>
+          <a:p>
+            <a:pPr algn="ctr"/>
+          </a:p>
+        </p:txBody>
+      </p:sp>
+      <p:sp>
+        <p:nvSpPr>
+          <p:cNvPr id="14" name="Rounded Rectangle 13"/>
+          <p:cNvSpPr/>
+          <p:nvPr/>
+        </p:nvSpPr>
+        <p:spPr>
+          <a:xfrm>
+            <a:off x="6377940" y="3017520"/>
+            <a:ext cx="2274570" cy="1920240"/>
+          </a:xfrm>
+          <a:prstGeom prst="roundRect">
+            <a:avLst/>
+          </a:prstGeom>
+          <a:solidFill>
+            <a:srgbClr val="FFFFFF"/>
+          </a:solidFill>
+          <a:ln w="15240">
+            <a:solidFill>
+              <a:srgbClr val="EADDC8"/>
+            </a:solidFill>
+          </a:ln>
+          <a:effectLst/>
+        </p:spPr>
+        <p:style>
+          <a:lnRef idx="1">
+            <a:schemeClr val="accent1"/>
+          </a:lnRef>
+          <a:fillRef idx="3">
+            <a:schemeClr val="accent1"/>
+          </a:fillRef>
+          <a:effectRef idx="2">
+            <a:schemeClr val="accent1"/>
+          </a:effectRef>
+          <a:fontRef idx="minor">
+            <a:schemeClr val="lt1"/>
+          </a:fontRef>
+        </p:style>
+        <p:txBody>
+          <a:bodyPr rtlCol="0" anchor="ctr"/>
+          <a:lstStyle/>
+          <a:p>
+            <a:pPr algn="ctr"/>
+          </a:p>
+        </p:txBody>
+      </p:sp>
+      <p:sp>
+        <p:nvSpPr>
+          <p:cNvPr id="15" name="Rectangle 14"/>
+          <p:cNvSpPr/>
+          <p:nvPr/>
+        </p:nvSpPr>
+        <p:spPr>
+          <a:xfrm>
+            <a:off x="6377940" y="3017520"/>
+            <a:ext cx="2274570" cy="128016"/>
+          </a:xfrm>
+          <a:prstGeom prst="rect">
+            <a:avLst/>
+          </a:prstGeom>
+          <a:solidFill>
+            <a:srgbClr val="4F772D"/>
+          </a:solidFill>
+          <a:ln>
+            <a:noFill/>
+          </a:ln>
+          <a:effectLst/>
+        </p:spPr>
+        <p:style>
+          <a:lnRef idx="1">
+            <a:schemeClr val="accent1"/>
+          </a:lnRef>
+          <a:fillRef idx="3">
+            <a:schemeClr val="accent1"/>
+          </a:fillRef>
+          <a:effectRef idx="2">
+            <a:schemeClr val="accent1"/>
+          </a:effectRef>
+          <a:fontRef idx="minor">
+            <a:schemeClr val="lt1"/>
+          </a:fontRef>
+        </p:style>
+        <p:txBody>
+          <a:bodyPr rtlCol="0" anchor="ctr"/>
+          <a:lstStyle/>
+          <a:p>
+            <a:pPr algn="ctr"/>
+          </a:p>
+        </p:txBody>
+      </p:sp>
+      <p:sp>
+        <p:nvSpPr>
+          <p:cNvPr id="16" name="TextBox 15"/>
+          <p:cNvSpPr txBox="1"/>
+          <p:nvPr/>
+        </p:nvSpPr>
+        <p:spPr>
+          <a:xfrm>
+            <a:off x="6515100" y="3474720"/>
+            <a:ext cx="2000250" cy="1280160"/>
+          </a:xfrm>
+          <a:prstGeom prst="rect">
+            <a:avLst/>
+          </a:prstGeom>
+          <a:noFill/>
+        </p:spPr>
+        <p:txBody>
+          <a:bodyPr wrap="square" anchor="ctr">
+            <a:spAutoFit/>
+          </a:bodyPr>
+          <a:lstStyle/>
+          <a:p>
+            <a:pPr algn="ctr">
+              <a:spcAft>
+                <a:spcPts val="600"/>
+              </a:spcAft>
+            </a:pPr>
+            <a:r>
+              <a:rPr sz="1900" b="1">
+                <a:solidFill>
+                  <a:srgbClr val="6D2E46"/>
+                </a:solidFill>
+                <a:latin typeface="Calibri"/>
+              </a:rPr>
+              <a:t>Service Worker</a:t>
+            </a:r>
+          </a:p>
+          <a:p>
+            <a:pPr algn="ctr">
+              <a:spcAft>
+                <a:spcPts val="600"/>
+              </a:spcAft>
+            </a:pPr>
+            <a:r>
+              <a:rPr sz="1400" b="0">
+                <a:solidFill>
+                  <a:srgbClr val="6F645B"/>
+                </a:solidFill>
+                <a:latin typeface="Calibri"/>
+              </a:rPr>
+              <a:t>sin conexión</a:t>
+            </a:r>
+          </a:p>
+        </p:txBody>
+      </p:sp>
+      <p:sp>
+        <p:nvSpPr>
+          <p:cNvPr id="17" name="Right Arrow 16"/>
+          <p:cNvSpPr/>
+          <p:nvPr/>
+        </p:nvSpPr>
+        <p:spPr>
+          <a:xfrm>
+            <a:off x="8707374" y="3776472"/>
+            <a:ext cx="393192" cy="402336"/>
+          </a:xfrm>
+          <a:prstGeom prst="rightArrow">
+            <a:avLst/>
+          </a:prstGeom>
+          <a:solidFill>
+            <a:srgbClr val="E3B23C"/>
+          </a:solidFill>
+          <a:ln>
+            <a:noFill/>
+          </a:ln>
+          <a:effectLst/>
+        </p:spPr>
+        <p:style>
+          <a:lnRef idx="1">
+            <a:schemeClr val="accent1"/>
+          </a:lnRef>
+          <a:fillRef idx="3">
+            <a:schemeClr val="accent1"/>
+          </a:fillRef>
+          <a:effectRef idx="2">
+            <a:schemeClr val="accent1"/>
+          </a:effectRef>
+          <a:fontRef idx="minor">
+            <a:schemeClr val="lt1"/>
+          </a:fontRef>
+        </p:style>
+        <p:txBody>
+          <a:bodyPr rtlCol="0" anchor="ctr"/>
+          <a:lstStyle/>
+          <a:p>
+            <a:pPr algn="ctr"/>
+          </a:p>
+        </p:txBody>
+      </p:sp>
+      <p:sp>
+        <p:nvSpPr>
+          <p:cNvPr id="18" name="Rounded Rectangle 17"/>
+          <p:cNvSpPr/>
+          <p:nvPr/>
+        </p:nvSpPr>
+        <p:spPr>
+          <a:xfrm>
+            <a:off x="9155430" y="3017520"/>
+            <a:ext cx="2274570" cy="1920240"/>
+          </a:xfrm>
+          <a:prstGeom prst="roundRect">
+            <a:avLst/>
+          </a:prstGeom>
+          <a:solidFill>
+            <a:srgbClr val="FFFFFF"/>
+          </a:solidFill>
+          <a:ln w="15240">
+            <a:solidFill>
+              <a:srgbClr val="EADDC8"/>
+            </a:solidFill>
+          </a:ln>
+          <a:effectLst/>
+        </p:spPr>
+        <p:style>
+          <a:lnRef idx="1">
+            <a:schemeClr val="accent1"/>
+          </a:lnRef>
+          <a:fillRef idx="3">
+            <a:schemeClr val="accent1"/>
+          </a:fillRef>
+          <a:effectRef idx="2">
+            <a:schemeClr val="accent1"/>
+          </a:effectRef>
+          <a:fontRef idx="minor">
+            <a:schemeClr val="lt1"/>
+          </a:fontRef>
+        </p:style>
+        <p:txBody>
+          <a:bodyPr rtlCol="0" anchor="ctr"/>
+          <a:lstStyle/>
+          <a:p>
+            <a:pPr algn="ctr"/>
+          </a:p>
+        </p:txBody>
+      </p:sp>
+      <p:sp>
+        <p:nvSpPr>
+          <p:cNvPr id="19" name="Rectangle 18"/>
+          <p:cNvSpPr/>
+          <p:nvPr/>
+        </p:nvSpPr>
+        <p:spPr>
+          <a:xfrm>
+            <a:off x="9155430" y="3017520"/>
+            <a:ext cx="2274570" cy="128016"/>
+          </a:xfrm>
+          <a:prstGeom prst="rect">
+            <a:avLst/>
+          </a:prstGeom>
+          <a:solidFill>
+            <a:srgbClr val="3A6B7E"/>
+          </a:solidFill>
+          <a:ln>
+            <a:noFill/>
+          </a:ln>
+          <a:effectLst/>
+        </p:spPr>
+        <p:style>
+          <a:lnRef idx="1">
+            <a:schemeClr val="accent1"/>
+          </a:lnRef>
+          <a:fillRef idx="3">
+            <a:schemeClr val="accent1"/>
+          </a:fillRef>
+          <a:effectRef idx="2">
+            <a:schemeClr val="accent1"/>
+          </a:effectRef>
+          <a:fontRef idx="minor">
+            <a:schemeClr val="lt1"/>
+          </a:fontRef>
+        </p:style>
+        <p:txBody>
+          <a:bodyPr rtlCol="0" anchor="ctr"/>
+          <a:lstStyle/>
+          <a:p>
+            <a:pPr algn="ctr"/>
+          </a:p>
+        </p:txBody>
+      </p:sp>
+      <p:sp>
+        <p:nvSpPr>
+          <p:cNvPr id="20" name="TextBox 19"/>
+          <p:cNvSpPr txBox="1"/>
+          <p:nvPr/>
+        </p:nvSpPr>
+        <p:spPr>
+          <a:xfrm>
+            <a:off x="9292590" y="3474720"/>
+            <a:ext cx="2000250" cy="1280160"/>
+          </a:xfrm>
+          <a:prstGeom prst="rect">
+            <a:avLst/>
+          </a:prstGeom>
+          <a:noFill/>
+        </p:spPr>
+        <p:txBody>
+          <a:bodyPr wrap="square" anchor="ctr">
+            <a:spAutoFit/>
+          </a:bodyPr>
+          <a:lstStyle/>
+          <a:p>
+            <a:pPr algn="ctr">
+              <a:spcAft>
+                <a:spcPts val="600"/>
+              </a:spcAft>
+            </a:pPr>
+            <a:r>
+              <a:rPr sz="1900" b="1">
+                <a:solidFill>
+                  <a:srgbClr val="6D2E46"/>
+                </a:solidFill>
+                <a:latin typeface="Calibri"/>
+              </a:rPr>
+              <a:t>Cloud Run</a:t>
+            </a:r>
+          </a:p>
+          <a:p>
+            <a:pPr algn="ctr">
+              <a:spcAft>
+                <a:spcPts val="600"/>
+              </a:spcAft>
+            </a:pPr>
+            <a:r>
+              <a:rPr sz="1400" b="0">
+                <a:solidFill>
+                  <a:srgbClr val="6F645B"/>
+                </a:solidFill>
+                <a:latin typeface="Calibri"/>
+              </a:rPr>
+              <a:t>URL para instalar</a:t>
+            </a:r>
+          </a:p>
+        </p:txBody>
+      </p:sp>
+      <p:sp>
+        <p:nvSpPr>
+          <p:cNvPr id="21" name="TextBox 20"/>
+          <p:cNvSpPr txBox="1"/>
+          <p:nvPr/>
+        </p:nvSpPr>
+        <p:spPr>
+          <a:xfrm>
+            <a:off x="868680" y="5394960"/>
+            <a:ext cx="10424160" cy="731520"/>
           </a:xfrm>
           <a:prstGeom prst="rect">
             <a:avLst/>
@@ -7599,122 +8806,19 @@
           </a:bodyPr>
           <a:lstStyle/>
           <a:p>
-            <a:pPr algn="ctr">
+            <a:pPr algn="l">
               <a:spcAft>
                 <a:spcPts val="600"/>
               </a:spcAft>
             </a:pPr>
             <a:r>
-              <a:rPr sz="1300" b="1">
-                <a:solidFill>
-                  <a:srgbClr val="6D2E46"/>
-                </a:solidFill>
-                <a:latin typeface="Calibri"/>
-              </a:rPr>
-              <a:t>Con datos y lista para instalar</a:t>
-            </a:r>
-          </a:p>
-        </p:txBody>
-      </p:sp>
-      <p:sp>
-        <p:nvSpPr>
-          <p:cNvPr id="9" name="TextBox 8"/>
-          <p:cNvSpPr txBox="1"/>
-          <p:nvPr/>
-        </p:nvSpPr>
-        <p:spPr>
-          <a:xfrm>
-            <a:off x="896112" y="2286000"/>
-            <a:ext cx="7680960" cy="4023360"/>
-          </a:xfrm>
-          <a:prstGeom prst="rect">
-            <a:avLst/>
-          </a:prstGeom>
-          <a:noFill/>
-        </p:spPr>
-        <p:txBody>
-          <a:bodyPr wrap="square">
-            <a:spAutoFit/>
-          </a:bodyPr>
-          <a:lstStyle/>
-          <a:p>
-            <a:pPr>
-              <a:spcAft>
-                <a:spcPts val="1500"/>
-              </a:spcAft>
-            </a:pPr>
-            <a:r>
-              <a:rPr sz="2200">
+              <a:rPr sz="1700" b="0">
                 <a:solidFill>
                   <a:srgbClr val="2B2B2B"/>
                 </a:solidFill>
                 <a:latin typeface="Calibri"/>
               </a:rPr>
-              <a:t>•  La lista sale de Firestore, no del código</a:t>
-            </a:r>
-          </a:p>
-          <a:p>
-            <a:pPr>
-              <a:spcAft>
-                <a:spcPts val="1500"/>
-              </a:spcAft>
-            </a:pPr>
-            <a:r>
-              <a:rPr sz="2200">
-                <a:solidFill>
-                  <a:srgbClr val="2B2B2B"/>
-                </a:solidFill>
-                <a:latin typeface="Calibri"/>
-              </a:rPr>
-              <a:t>•  El formulario (＋) crea registros nuevos</a:t>
-            </a:r>
-          </a:p>
-          <a:p>
-            <a:pPr>
-              <a:spcAft>
-                <a:spcPts val="1500"/>
-              </a:spcAft>
-            </a:pPr>
-            <a:r>
-              <a:rPr sz="2200">
-                <a:solidFill>
-                  <a:srgbClr val="2B2B2B"/>
-                </a:solidFill>
-                <a:latin typeface="Calibri"/>
-              </a:rPr>
-              <a:t>•  Aparecen sin recargar, gracias a onSnapshot</a:t>
-            </a:r>
-          </a:p>
-          <a:p>
-            <a:pPr>
-              <a:spcAft>
-                <a:spcPts val="1500"/>
-              </a:spcAft>
-            </a:pPr>
-            <a:r>
-              <a:rPr sz="2200">
-                <a:solidFill>
-                  <a:srgbClr val="2B2B2B"/>
-                </a:solidFill>
-                <a:latin typeface="Calibri"/>
-              </a:rPr>
-              <a:t>•  Manifest + íconos + service worker → instalable</a:t>
-            </a:r>
-          </a:p>
-          <a:p>
-            <a:pPr>
-              <a:spcAft>
-                <a:spcPts val="1500"/>
-              </a:spcAft>
-            </a:pPr>
-            <a:r>
-              <a:rPr sz="2200">
-                <a:solidFill>
-                  <a:srgbClr val="2B2B2B"/>
-                </a:solidFill>
-                <a:latin typeface="Calibri"/>
-              </a:rPr>
-              <a:t>•  Publicada en Cloud Run con su propia URL</a:t>
+              <a:t>Con esas tres piezas el teléfono ofrece "Instalar". Cloud Run publica tu app con una dirección https propia.</a:t>
             </a:r>
           </a:p>
         </p:txBody>
